--- a/shuzhi/2026转正述职_测试工程师_谢仕杰.pptx
+++ b/shuzhi/2026转正述职_测试工程师_谢仕杰.pptx
@@ -13606,7 +13606,7 @@
         <p:spPr>
           <a:xfrm>
             <a:off x="662509" y="1052250"/>
-            <a:ext cx="6480720" cy="521970"/>
+            <a:ext cx="11049000" cy="521970"/>
           </a:xfrm>
           <a:prstGeom prst="rect">
             <a:avLst/>
@@ -13617,25 +13617,21 @@
             <a:spAutoFit/>
           </a:bodyPr>
           <a:p>
+            <a:pPr>
+              <a:lnSpc>
+                <a:spcPct val="112000"/>
+              </a:lnSpc>
+              <a:spcAft>
+                <a:spcPts val="0"/>
+              </a:spcAft>
+            </a:pPr>
             <a:r>
-              <a:rPr lang="zh-CN" altLang="en-US" sz="2800" b="1" dirty="0" smtClean="0">
-                <a:solidFill>
-                  <a:schemeClr val="bg1"/>
-                </a:solidFill>
-                <a:latin typeface="微软雅黑" panose="020B0503020204020204" charset="-122"/>
-                <a:ea typeface="微软雅黑" panose="020B0503020204020204" charset="-122"/>
+              <a:rPr sz="1400" b="1">
+                <a:latin typeface="微软雅黑"/>
+                <a:ea typeface="微软雅黑"/>
+                <a:cs typeface="微软雅黑"/>
               </a:rPr>
-              <a:t>关键绩效行为实例</a:t>
-            </a:r>
-            <a:r>
-              <a:rPr lang="en-US" altLang="zh-CN" sz="2800" b="1" dirty="0" smtClean="0">
-                <a:solidFill>
-                  <a:schemeClr val="bg1"/>
-                </a:solidFill>
-                <a:latin typeface="微软雅黑" panose="020B0503020204020204" charset="-122"/>
-                <a:ea typeface="微软雅黑" panose="020B0503020204020204" charset="-122"/>
-              </a:rPr>
-              <a:t>2</a:t>
+              <a:t>关键绩效行为实例2：高效 —— 缺陷同步自动化与测试资产模板化</a:t>
             </a:r>
             <a:endParaRPr lang="en-US" altLang="zh-CN" sz="2800" b="1" dirty="0" smtClean="0">
               <a:solidFill>
@@ -13655,8 +13651,8 @@
         </p:nvSpPr>
         <p:spPr>
           <a:xfrm>
-            <a:off x="1174115" y="1897380"/>
-            <a:ext cx="6096000" cy="368300"/>
+            <a:off x="762000" y="1778000"/>
+            <a:ext cx="10795000" cy="4572000"/>
           </a:xfrm>
           <a:prstGeom prst="rect">
             <a:avLst/>
@@ -13668,53 +13664,21 @@
             <a:spAutoFit/>
           </a:bodyPr>
           <a:p>
+            <a:pPr>
+              <a:lnSpc>
+                <a:spcPct val="108000"/>
+              </a:lnSpc>
+              <a:spcAft>
+                <a:spcPts val="200"/>
+              </a:spcAft>
+            </a:pPr>
             <a:r>
-              <a:rPr lang="zh-CN" altLang="en-US" dirty="0" smtClean="0">
-                <a:solidFill>
-                  <a:schemeClr val="bg1"/>
-                </a:solidFill>
-                <a:latin typeface="微软雅黑" panose="020B0503020204020204" charset="-122"/>
-                <a:ea typeface="微软雅黑" panose="020B0503020204020204" charset="-122"/>
-                <a:cs typeface="微软雅黑" panose="020B0503020204020204" charset="-122"/>
-                <a:sym typeface="+mn-ea"/>
+              <a:rPr sz="1150" b="1">
+                <a:latin typeface="微软雅黑"/>
+                <a:ea typeface="微软雅黑"/>
+                <a:cs typeface="微软雅黑"/>
               </a:rPr>
-              <a:t>请用</a:t>
-            </a:r>
-            <a:r>
-              <a:rPr lang="en-US" altLang="zh-CN" dirty="0" smtClean="0">
-                <a:solidFill>
-                  <a:schemeClr val="bg1"/>
-                </a:solidFill>
-                <a:latin typeface="微软雅黑" panose="020B0503020204020204" charset="-122"/>
-                <a:ea typeface="微软雅黑" panose="020B0503020204020204" charset="-122"/>
-                <a:cs typeface="微软雅黑" panose="020B0503020204020204" charset="-122"/>
-                <a:sym typeface="+mn-ea"/>
-              </a:rPr>
-              <a:t>START</a:t>
-            </a:r>
-            <a:r>
-              <a:rPr lang="zh-CN" altLang="en-US" dirty="0" smtClean="0">
-                <a:solidFill>
-                  <a:schemeClr val="bg1"/>
-                </a:solidFill>
-                <a:latin typeface="微软雅黑" panose="020B0503020204020204" charset="-122"/>
-                <a:ea typeface="微软雅黑" panose="020B0503020204020204" charset="-122"/>
-                <a:cs typeface="微软雅黑" panose="020B0503020204020204" charset="-122"/>
-                <a:sym typeface="+mn-ea"/>
-              </a:rPr>
-              <a:t>结构进行展示，述职时</a:t>
-            </a:r>
-            <a:r>
-              <a:rPr lang="zh-CN" altLang="en-US" dirty="0" smtClean="0">
-                <a:solidFill>
-                  <a:schemeClr val="bg1"/>
-                </a:solidFill>
-                <a:latin typeface="微软雅黑" panose="020B0503020204020204" charset="-122"/>
-                <a:ea typeface="微软雅黑" panose="020B0503020204020204" charset="-122"/>
-                <a:cs typeface="微软雅黑" panose="020B0503020204020204" charset="-122"/>
-                <a:sym typeface="+mn-ea"/>
-              </a:rPr>
-              <a:t>请删除</a:t>
+              <a:t>对应能力：高效（自评：杰出）</a:t>
             </a:r>
             <a:endParaRPr lang="zh-CN" altLang="en-US" dirty="0" smtClean="0">
               <a:solidFill>
@@ -13725,6 +13689,214 @@
               <a:cs typeface="微软雅黑" panose="020B0503020204020204" charset="-122"/>
               <a:sym typeface="+mn-ea"/>
             </a:endParaRPr>
+          </a:p>
+          <a:p>
+            <a:pPr>
+              <a:lnSpc>
+                <a:spcPct val="108000"/>
+              </a:lnSpc>
+              <a:spcAft>
+                <a:spcPts val="400"/>
+              </a:spcAft>
+            </a:pPr>
+          </a:p>
+          <a:p>
+            <a:pPr>
+              <a:lnSpc>
+                <a:spcPct val="108000"/>
+              </a:lnSpc>
+              <a:spcAft>
+                <a:spcPts val="200"/>
+              </a:spcAft>
+            </a:pPr>
+            <a:r>
+              <a:rPr sz="1150" b="1">
+                <a:latin typeface="微软雅黑"/>
+                <a:ea typeface="微软雅黑"/>
+                <a:cs typeface="微软雅黑"/>
+              </a:rPr>
+              <a:t>S 情景</a:t>
+            </a:r>
+          </a:p>
+          <a:p>
+            <a:pPr>
+              <a:lnSpc>
+                <a:spcPct val="108000"/>
+              </a:lnSpc>
+              <a:spcAft>
+                <a:spcPts val="200"/>
+              </a:spcAft>
+            </a:pPr>
+            <a:r>
+              <a:rPr sz="1050" b="0">
+                <a:latin typeface="微软雅黑"/>
+                <a:ea typeface="微软雅黑"/>
+                <a:cs typeface="微软雅黑"/>
+              </a:rPr>
+              <a:t>v1.0.0 迭代有 62 个缺陷，每天需要人工打开 TAPD 筛选、复制、整理成简报，重复劳动多，且容易漏掉状态变更。</a:t>
+            </a:r>
+          </a:p>
+          <a:p>
+            <a:pPr>
+              <a:lnSpc>
+                <a:spcPct val="108000"/>
+              </a:lnSpc>
+              <a:spcAft>
+                <a:spcPts val="200"/>
+              </a:spcAft>
+            </a:pPr>
+            <a:r>
+              <a:rPr sz="1150" b="1">
+                <a:latin typeface="微软雅黑"/>
+                <a:ea typeface="微软雅黑"/>
+                <a:cs typeface="微软雅黑"/>
+              </a:rPr>
+              <a:t>T 行为</a:t>
+            </a:r>
+          </a:p>
+          <a:p>
+            <a:pPr>
+              <a:lnSpc>
+                <a:spcPct val="108000"/>
+              </a:lnSpc>
+              <a:spcAft>
+                <a:spcPts val="200"/>
+              </a:spcAft>
+            </a:pPr>
+            <a:r>
+              <a:rPr sz="1050" b="0">
+                <a:latin typeface="微软雅黑"/>
+                <a:ea typeface="微软雅黑"/>
+                <a:cs typeface="微软雅黑"/>
+              </a:rPr>
+              <a:t>我把查询与汇总脚本化，配置为每天 16:00 自动向企微推送当日待办简报，团队无需再手工拉取。</a:t>
+            </a:r>
+          </a:p>
+          <a:p>
+            <a:pPr>
+              <a:lnSpc>
+                <a:spcPct val="108000"/>
+              </a:lnSpc>
+              <a:spcAft>
+                <a:spcPts val="200"/>
+              </a:spcAft>
+            </a:pPr>
+            <a:r>
+              <a:rPr sz="1050" b="0">
+                <a:latin typeface="微软雅黑"/>
+                <a:ea typeface="微软雅黑"/>
+                <a:cs typeface="微软雅黑"/>
+              </a:rPr>
+              <a:t>同时将冒烟测试报告、缺陷描述、各类检查清单模板化，并额外做了一版 HTML 邮件模板，直接解决粘贴到邮箱后排版错乱的问题。</a:t>
+            </a:r>
+          </a:p>
+          <a:p>
+            <a:pPr>
+              <a:lnSpc>
+                <a:spcPct val="108000"/>
+              </a:lnSpc>
+              <a:spcAft>
+                <a:spcPts val="200"/>
+              </a:spcAft>
+            </a:pPr>
+            <a:r>
+              <a:rPr sz="1150" b="1">
+                <a:latin typeface="微软雅黑"/>
+                <a:ea typeface="微软雅黑"/>
+                <a:cs typeface="微软雅黑"/>
+              </a:rPr>
+              <a:t>A 影响</a:t>
+            </a:r>
+          </a:p>
+          <a:p>
+            <a:pPr>
+              <a:lnSpc>
+                <a:spcPct val="108000"/>
+              </a:lnSpc>
+              <a:spcAft>
+                <a:spcPts val="200"/>
+              </a:spcAft>
+            </a:pPr>
+            <a:r>
+              <a:rPr sz="1050" b="0">
+                <a:latin typeface="微软雅黑"/>
+                <a:ea typeface="微软雅黑"/>
+                <a:cs typeface="微软雅黑"/>
+              </a:rPr>
+              <a:t>日常信息同步不再占用人工时间，项目组每天固定时间收到一致的缺陷视图；新人直接套用模板即可输出，格式与口径统一。</a:t>
+            </a:r>
+          </a:p>
+          <a:p>
+            <a:pPr>
+              <a:lnSpc>
+                <a:spcPct val="108000"/>
+              </a:lnSpc>
+              <a:spcAft>
+                <a:spcPts val="200"/>
+              </a:spcAft>
+            </a:pPr>
+            <a:r>
+              <a:rPr sz="1150" b="1">
+                <a:latin typeface="微软雅黑"/>
+                <a:ea typeface="微软雅黑"/>
+                <a:cs typeface="微软雅黑"/>
+              </a:rPr>
+              <a:t>R 结果</a:t>
+            </a:r>
+          </a:p>
+          <a:p>
+            <a:pPr>
+              <a:lnSpc>
+                <a:spcPct val="108000"/>
+              </a:lnSpc>
+              <a:spcAft>
+                <a:spcPts val="200"/>
+              </a:spcAft>
+            </a:pPr>
+            <a:r>
+              <a:rPr sz="1050" b="0">
+                <a:latin typeface="微软雅黑"/>
+                <a:ea typeface="微软雅黑"/>
+                <a:cs typeface="微软雅黑"/>
+              </a:rPr>
+              <a:t>缺陷状态同步由「人工拉取」转为「自动推送」，漏跟进情况明显减少；测试报告的产出从半小时级压缩到分钟级。</a:t>
+            </a:r>
+          </a:p>
+          <a:p>
+            <a:pPr>
+              <a:lnSpc>
+                <a:spcPct val="108000"/>
+              </a:lnSpc>
+              <a:spcAft>
+                <a:spcPts val="200"/>
+              </a:spcAft>
+            </a:pPr>
+            <a:r>
+              <a:rPr sz="1150" b="1">
+                <a:latin typeface="微软雅黑"/>
+                <a:ea typeface="微软雅黑"/>
+                <a:cs typeface="微软雅黑"/>
+              </a:rPr>
+              <a:t>T 反思</a:t>
+            </a:r>
+          </a:p>
+          <a:p>
+            <a:pPr>
+              <a:lnSpc>
+                <a:spcPct val="108000"/>
+              </a:lnSpc>
+              <a:spcAft>
+                <a:spcPts val="200"/>
+              </a:spcAft>
+            </a:pPr>
+            <a:r>
+              <a:rPr sz="1050" b="0">
+                <a:latin typeface="微软雅黑"/>
+                <a:ea typeface="微软雅黑"/>
+                <a:cs typeface="微软雅黑"/>
+              </a:rPr>
+              <a:t>自动化的价值不在炫技，而在于把确定性的重复劳动固化下来。下一步计划把回归用例集也纳入同一套脚本，形成「缺陷—用例—回归」闭环。</a:t>
+            </a:r>
           </a:p>
         </p:txBody>
       </p:sp>
@@ -13755,7 +13927,7 @@
         <p:spPr>
           <a:xfrm>
             <a:off x="662509" y="1052250"/>
-            <a:ext cx="6480720" cy="521970"/>
+            <a:ext cx="11049000" cy="521970"/>
           </a:xfrm>
           <a:prstGeom prst="rect">
             <a:avLst/>
@@ -13766,25 +13938,21 @@
             <a:spAutoFit/>
           </a:bodyPr>
           <a:p>
+            <a:pPr>
+              <a:lnSpc>
+                <a:spcPct val="112000"/>
+              </a:lnSpc>
+              <a:spcAft>
+                <a:spcPts val="0"/>
+              </a:spcAft>
+            </a:pPr>
             <a:r>
-              <a:rPr lang="zh-CN" altLang="en-US" sz="2800" b="1" dirty="0" smtClean="0">
-                <a:solidFill>
-                  <a:schemeClr val="bg1"/>
-                </a:solidFill>
-                <a:latin typeface="微软雅黑" panose="020B0503020204020204" charset="-122"/>
-                <a:ea typeface="微软雅黑" panose="020B0503020204020204" charset="-122"/>
+              <a:rPr sz="1400" b="1">
+                <a:latin typeface="微软雅黑"/>
+                <a:ea typeface="微软雅黑"/>
+                <a:cs typeface="微软雅黑"/>
               </a:rPr>
-              <a:t>关键绩效行为实例</a:t>
-            </a:r>
-            <a:r>
-              <a:rPr lang="en-US" altLang="zh-CN" sz="2800" b="1" dirty="0" smtClean="0">
-                <a:solidFill>
-                  <a:schemeClr val="bg1"/>
-                </a:solidFill>
-                <a:latin typeface="微软雅黑" panose="020B0503020204020204" charset="-122"/>
-                <a:ea typeface="微软雅黑" panose="020B0503020204020204" charset="-122"/>
-              </a:rPr>
-              <a:t>3</a:t>
+              <a:t>关键绩效行为实例3：长期主义 —— 跨端统计口径统一</a:t>
             </a:r>
             <a:endParaRPr lang="en-US" altLang="zh-CN" sz="2800" b="1" dirty="0" smtClean="0">
               <a:solidFill>
@@ -13804,8 +13972,8 @@
         </p:nvSpPr>
         <p:spPr>
           <a:xfrm>
-            <a:off x="922020" y="2675255"/>
-            <a:ext cx="6096000" cy="368300"/>
+            <a:off x="762000" y="1778000"/>
+            <a:ext cx="10795000" cy="4572000"/>
           </a:xfrm>
           <a:prstGeom prst="rect">
             <a:avLst/>
@@ -13817,53 +13985,21 @@
             <a:spAutoFit/>
           </a:bodyPr>
           <a:p>
+            <a:pPr>
+              <a:lnSpc>
+                <a:spcPct val="108000"/>
+              </a:lnSpc>
+              <a:spcAft>
+                <a:spcPts val="200"/>
+              </a:spcAft>
+            </a:pPr>
             <a:r>
-              <a:rPr lang="zh-CN" altLang="en-US" dirty="0" smtClean="0">
-                <a:solidFill>
-                  <a:schemeClr val="bg1"/>
-                </a:solidFill>
-                <a:latin typeface="微软雅黑" panose="020B0503020204020204" charset="-122"/>
-                <a:ea typeface="微软雅黑" panose="020B0503020204020204" charset="-122"/>
-                <a:cs typeface="微软雅黑" panose="020B0503020204020204" charset="-122"/>
-                <a:sym typeface="+mn-ea"/>
+              <a:rPr sz="1150" b="1">
+                <a:latin typeface="微软雅黑"/>
+                <a:ea typeface="微软雅黑"/>
+                <a:cs typeface="微软雅黑"/>
               </a:rPr>
-              <a:t>请用</a:t>
-            </a:r>
-            <a:r>
-              <a:rPr lang="en-US" altLang="zh-CN" dirty="0" smtClean="0">
-                <a:solidFill>
-                  <a:schemeClr val="bg1"/>
-                </a:solidFill>
-                <a:latin typeface="微软雅黑" panose="020B0503020204020204" charset="-122"/>
-                <a:ea typeface="微软雅黑" panose="020B0503020204020204" charset="-122"/>
-                <a:cs typeface="微软雅黑" panose="020B0503020204020204" charset="-122"/>
-                <a:sym typeface="+mn-ea"/>
-              </a:rPr>
-              <a:t>START</a:t>
-            </a:r>
-            <a:r>
-              <a:rPr lang="zh-CN" altLang="en-US" dirty="0" smtClean="0">
-                <a:solidFill>
-                  <a:schemeClr val="bg1"/>
-                </a:solidFill>
-                <a:latin typeface="微软雅黑" panose="020B0503020204020204" charset="-122"/>
-                <a:ea typeface="微软雅黑" panose="020B0503020204020204" charset="-122"/>
-                <a:cs typeface="微软雅黑" panose="020B0503020204020204" charset="-122"/>
-                <a:sym typeface="+mn-ea"/>
-              </a:rPr>
-              <a:t>结构进行展示，述职时</a:t>
-            </a:r>
-            <a:r>
-              <a:rPr lang="zh-CN" altLang="en-US" dirty="0" smtClean="0">
-                <a:solidFill>
-                  <a:schemeClr val="bg1"/>
-                </a:solidFill>
-                <a:latin typeface="微软雅黑" panose="020B0503020204020204" charset="-122"/>
-                <a:ea typeface="微软雅黑" panose="020B0503020204020204" charset="-122"/>
-                <a:cs typeface="微软雅黑" panose="020B0503020204020204" charset="-122"/>
-                <a:sym typeface="+mn-ea"/>
-              </a:rPr>
-              <a:t>请删除</a:t>
+              <a:t>对应能力：长期主义（自评：良好）</a:t>
             </a:r>
             <a:endParaRPr lang="zh-CN" altLang="en-US" dirty="0" smtClean="0">
               <a:solidFill>
@@ -13874,6 +14010,214 @@
               <a:cs typeface="微软雅黑" panose="020B0503020204020204" charset="-122"/>
               <a:sym typeface="+mn-ea"/>
             </a:endParaRPr>
+          </a:p>
+          <a:p>
+            <a:pPr>
+              <a:lnSpc>
+                <a:spcPct val="108000"/>
+              </a:lnSpc>
+              <a:spcAft>
+                <a:spcPts val="400"/>
+              </a:spcAft>
+            </a:pPr>
+          </a:p>
+          <a:p>
+            <a:pPr>
+              <a:lnSpc>
+                <a:spcPct val="108000"/>
+              </a:lnSpc>
+              <a:spcAft>
+                <a:spcPts val="200"/>
+              </a:spcAft>
+            </a:pPr>
+            <a:r>
+              <a:rPr sz="1150" b="1">
+                <a:latin typeface="微软雅黑"/>
+                <a:ea typeface="微软雅黑"/>
+                <a:cs typeface="微软雅黑"/>
+              </a:rPr>
+              <a:t>S 情景</a:t>
+            </a:r>
+          </a:p>
+          <a:p>
+            <a:pPr>
+              <a:lnSpc>
+                <a:spcPct val="108000"/>
+              </a:lnSpc>
+              <a:spcAft>
+                <a:spcPts val="200"/>
+              </a:spcAft>
+            </a:pPr>
+            <a:r>
+              <a:rPr sz="1050" b="0">
+                <a:latin typeface="微软雅黑"/>
+                <a:ea typeface="微软雅黑"/>
+                <a:cs typeface="微软雅黑"/>
+              </a:rPr>
+              <a:t>数据统计模块先后出现两个缺陷：App 端对战记录中「场统计」与「技术统计」同一字段数值不一致（平均上手次数一处 0.5、一处 0.0）；小程序端平均犯规次数恒为 0。表面看是两个独立问题。</a:t>
+            </a:r>
+          </a:p>
+          <a:p>
+            <a:pPr>
+              <a:lnSpc>
+                <a:spcPct val="108000"/>
+              </a:lnSpc>
+              <a:spcAft>
+                <a:spcPts val="200"/>
+              </a:spcAft>
+            </a:pPr>
+            <a:r>
+              <a:rPr sz="1150" b="1">
+                <a:latin typeface="微软雅黑"/>
+                <a:ea typeface="微软雅黑"/>
+                <a:cs typeface="微软雅黑"/>
+              </a:rPr>
+              <a:t>T 行为</a:t>
+            </a:r>
+          </a:p>
+          <a:p>
+            <a:pPr>
+              <a:lnSpc>
+                <a:spcPct val="108000"/>
+              </a:lnSpc>
+              <a:spcAft>
+                <a:spcPts val="200"/>
+              </a:spcAft>
+            </a:pPr>
+            <a:r>
+              <a:rPr sz="1050" b="0">
+                <a:latin typeface="微软雅黑"/>
+                <a:ea typeface="微软雅黑"/>
+                <a:cs typeface="微软雅黑"/>
+              </a:rPr>
+              <a:t>我把两个缺陷放在一起比对，判断它们指向同一根因——统计字段的小数位精度规则与取值逻辑未统一。</a:t>
+            </a:r>
+          </a:p>
+          <a:p>
+            <a:pPr>
+              <a:lnSpc>
+                <a:spcPct val="108000"/>
+              </a:lnSpc>
+              <a:spcAft>
+                <a:spcPts val="200"/>
+              </a:spcAft>
+            </a:pPr>
+            <a:r>
+              <a:rPr sz="1050" b="0">
+                <a:latin typeface="微软雅黑"/>
+                <a:ea typeface="微软雅黑"/>
+                <a:cs typeface="微软雅黑"/>
+              </a:rPr>
+              <a:t>我没有直接下结论，而是先与产品对齐口径，确认「犯规次数 / 平均上手次数 / 平均失误次数」统一保留一位小数，架杆成功率、走位成功率保持不变，再推动三端交叉验证。</a:t>
+            </a:r>
+          </a:p>
+          <a:p>
+            <a:pPr>
+              <a:lnSpc>
+                <a:spcPct val="108000"/>
+              </a:lnSpc>
+              <a:spcAft>
+                <a:spcPts val="200"/>
+              </a:spcAft>
+            </a:pPr>
+            <a:r>
+              <a:rPr sz="1150" b="1">
+                <a:latin typeface="微软雅黑"/>
+                <a:ea typeface="微软雅黑"/>
+                <a:cs typeface="微软雅黑"/>
+              </a:rPr>
+              <a:t>A 影响</a:t>
+            </a:r>
+          </a:p>
+          <a:p>
+            <a:pPr>
+              <a:lnSpc>
+                <a:spcPct val="108000"/>
+              </a:lnSpc>
+              <a:spcAft>
+                <a:spcPts val="200"/>
+              </a:spcAft>
+            </a:pPr>
+            <a:r>
+              <a:rPr sz="1050" b="0">
+                <a:latin typeface="微软雅黑"/>
+                <a:ea typeface="微软雅黑"/>
+                <a:cs typeface="微软雅黑"/>
+              </a:rPr>
+              <a:t>把分散在两个缺陷里的同类问题合并为一条规则，避免各端各自修改、改完仍然不一致。</a:t>
+            </a:r>
+          </a:p>
+          <a:p>
+            <a:pPr>
+              <a:lnSpc>
+                <a:spcPct val="108000"/>
+              </a:lnSpc>
+              <a:spcAft>
+                <a:spcPts val="200"/>
+              </a:spcAft>
+            </a:pPr>
+            <a:r>
+              <a:rPr sz="1150" b="1">
+                <a:latin typeface="微软雅黑"/>
+                <a:ea typeface="微软雅黑"/>
+                <a:cs typeface="微软雅黑"/>
+              </a:rPr>
+              <a:t>R 结果</a:t>
+            </a:r>
+          </a:p>
+          <a:p>
+            <a:pPr>
+              <a:lnSpc>
+                <a:spcPct val="108000"/>
+              </a:lnSpc>
+              <a:spcAft>
+                <a:spcPts val="200"/>
+              </a:spcAft>
+            </a:pPr>
+            <a:r>
+              <a:rPr sz="1050" b="0">
+                <a:latin typeface="微软雅黑"/>
+                <a:ea typeface="微软雅黑"/>
+                <a:cs typeface="微软雅黑"/>
+              </a:rPr>
+              <a:t>两端数据与口径统一，两个缺陷均闭环；同时明确此类精度规则需固化进测试用例基线，防止下个迭代重犯。</a:t>
+            </a:r>
+          </a:p>
+          <a:p>
+            <a:pPr>
+              <a:lnSpc>
+                <a:spcPct val="108000"/>
+              </a:lnSpc>
+              <a:spcAft>
+                <a:spcPts val="200"/>
+              </a:spcAft>
+            </a:pPr>
+            <a:r>
+              <a:rPr sz="1150" b="1">
+                <a:latin typeface="微软雅黑"/>
+                <a:ea typeface="微软雅黑"/>
+                <a:cs typeface="微软雅黑"/>
+              </a:rPr>
+              <a:t>T 反思</a:t>
+            </a:r>
+          </a:p>
+          <a:p>
+            <a:pPr>
+              <a:lnSpc>
+                <a:spcPct val="108000"/>
+              </a:lnSpc>
+              <a:spcAft>
+                <a:spcPts val="200"/>
+              </a:spcAft>
+            </a:pPr>
+            <a:r>
+              <a:rPr sz="1050" b="0">
+                <a:latin typeface="微软雅黑"/>
+                <a:ea typeface="微软雅黑"/>
+                <a:cs typeface="微软雅黑"/>
+              </a:rPr>
+              <a:t>单点验证容易漏，跨端同字段必须交叉比对。我也意识到口径类问题要拉产品一起定，测试单方面判断容易偏。</a:t>
+            </a:r>
           </a:p>
         </p:txBody>
       </p:sp>
@@ -14002,7 +14346,7 @@
           </a:extLst>
         </p:spPr>
         <p:txBody>
-          <a:bodyPr anchor="ctr"/>
+          <a:bodyPr anchor="ctr" wrap="square"/>
           <a:lstStyle>
             <a:lvl1pPr>
               <a:defRPr kumimoji="1" sz="2400">
@@ -14113,32 +14457,23 @@
           <a:p>
             <a:pPr indent="0" fontAlgn="auto">
               <a:lnSpc>
-                <a:spcPct val="150000"/>
+                <a:spcPct val="112000"/>
               </a:lnSpc>
               <a:spcBef>
                 <a:spcPts val="600"/>
               </a:spcBef>
+              <a:spcAft>
+                <a:spcPts val="200"/>
+              </a:spcAft>
               <a:defRPr/>
             </a:pPr>
             <a:r>
-              <a:rPr kumimoji="0" lang="en-US" altLang="zh-CN" sz="1800" b="1" dirty="0" smtClean="0">
-                <a:solidFill>
-                  <a:schemeClr val="bg1"/>
-                </a:solidFill>
-                <a:latin typeface="微软雅黑" panose="020B0503020204020204" charset="-122"/>
-                <a:ea typeface="微软雅黑" panose="020B0503020204020204" charset="-122"/>
+              <a:rPr sz="1200" b="1">
+                <a:latin typeface="微软雅黑"/>
+                <a:ea typeface="微软雅黑"/>
+                <a:cs typeface="微软雅黑"/>
               </a:rPr>
-              <a:t>1.</a:t>
-            </a:r>
-            <a:r>
-              <a:rPr kumimoji="0" lang="zh-CN" altLang="en-US" sz="1800" b="1" dirty="0" smtClean="0">
-                <a:solidFill>
-                  <a:schemeClr val="bg1"/>
-                </a:solidFill>
-                <a:latin typeface="微软雅黑" panose="020B0503020204020204" charset="-122"/>
-                <a:ea typeface="微软雅黑" panose="020B0503020204020204" charset="-122"/>
-              </a:rPr>
-              <a:t>转正后的核心工作内容、工作推进方式、需要达成的工作目标</a:t>
+              <a:t>1　转正后的核心工作内容</a:t>
             </a:r>
             <a:endParaRPr kumimoji="0" lang="zh-CN" altLang="en-US" sz="1800" b="1" dirty="0" smtClean="0">
               <a:solidFill>
@@ -14149,42 +14484,268 @@
             </a:endParaRPr>
           </a:p>
           <a:p>
-            <a:pPr indent="0" fontAlgn="auto">
+            <a:pPr>
               <a:lnSpc>
-                <a:spcPct val="150000"/>
+                <a:spcPct val="112000"/>
               </a:lnSpc>
-              <a:spcBef>
-                <a:spcPts val="600"/>
-              </a:spcBef>
-              <a:defRPr/>
+              <a:spcAft>
+                <a:spcPts val="200"/>
+              </a:spcAft>
             </a:pPr>
             <a:r>
-              <a:rPr kumimoji="0" lang="en-US" altLang="zh-CN" sz="1800" b="1" dirty="0" smtClean="0">
-                <a:solidFill>
-                  <a:schemeClr val="bg1"/>
-                </a:solidFill>
-                <a:latin typeface="微软雅黑" panose="020B0503020204020204" charset="-122"/>
-                <a:ea typeface="微软雅黑" panose="020B0503020204020204" charset="-122"/>
+              <a:rPr sz="1100" b="0">
+                <a:latin typeface="微软雅黑"/>
+                <a:ea typeface="微软雅黑"/>
+                <a:cs typeface="微软雅黑"/>
               </a:rPr>
-              <a:t>2.</a:t>
+              <a:t>承接 v1.0.2 及后续迭代测试，覆盖功能、兼容性、性能与数据一致性；参与需求评审，把风险识别前移。</a:t>
             </a:r>
+          </a:p>
+          <a:p>
+            <a:pPr>
+              <a:lnSpc>
+                <a:spcPct val="112000"/>
+              </a:lnSpc>
+              <a:spcAft>
+                <a:spcPts val="400"/>
+              </a:spcAft>
+            </a:pPr>
+          </a:p>
+          <a:p>
+            <a:pPr>
+              <a:lnSpc>
+                <a:spcPct val="112000"/>
+              </a:lnSpc>
+              <a:spcAft>
+                <a:spcPts val="200"/>
+              </a:spcAft>
+            </a:pPr>
             <a:r>
-              <a:rPr kumimoji="0" lang="zh-CN" altLang="en-US" sz="1800" b="1" dirty="0" smtClean="0">
-                <a:solidFill>
-                  <a:schemeClr val="bg1"/>
-                </a:solidFill>
-                <a:latin typeface="微软雅黑" panose="020B0503020204020204" charset="-122"/>
-                <a:ea typeface="微软雅黑" panose="020B0503020204020204" charset="-122"/>
+              <a:rPr sz="1200" b="1">
+                <a:latin typeface="微软雅黑"/>
+                <a:ea typeface="微软雅黑"/>
+                <a:cs typeface="微软雅黑"/>
               </a:rPr>
-              <a:t>阐述个人成长与职业发展规划</a:t>
+              <a:t>2　工作推进方式</a:t>
             </a:r>
-            <a:endParaRPr kumimoji="0" lang="zh-CN" altLang="en-US" sz="1800" b="1" dirty="0" smtClean="0">
-              <a:solidFill>
-                <a:schemeClr val="bg1"/>
-              </a:solidFill>
-              <a:latin typeface="微软雅黑" panose="020B0503020204020204" charset="-122"/>
-              <a:ea typeface="微软雅黑" panose="020B0503020204020204" charset="-122"/>
-            </a:endParaRPr>
+          </a:p>
+          <a:p>
+            <a:pPr>
+              <a:lnSpc>
+                <a:spcPct val="112000"/>
+              </a:lnSpc>
+              <a:spcAft>
+                <a:spcPts val="200"/>
+              </a:spcAft>
+            </a:pPr>
+            <a:r>
+              <a:rPr sz="1100" b="0">
+                <a:latin typeface="微软雅黑"/>
+                <a:ea typeface="微软雅黑"/>
+                <a:cs typeface="微软雅黑"/>
+              </a:rPr>
+              <a:t>① 建立「缺陷—用例—回归」闭环，回归优先级由缺陷等级决定；</a:t>
+            </a:r>
+          </a:p>
+          <a:p>
+            <a:pPr>
+              <a:lnSpc>
+                <a:spcPct val="112000"/>
+              </a:lnSpc>
+              <a:spcAft>
+                <a:spcPts val="200"/>
+              </a:spcAft>
+            </a:pPr>
+            <a:r>
+              <a:rPr sz="1100" b="0">
+                <a:latin typeface="微软雅黑"/>
+                <a:ea typeface="微软雅黑"/>
+                <a:cs typeface="微软雅黑"/>
+              </a:rPr>
+              <a:t>② 推进接口测试与冒烟自动化，压缩回归周期；</a:t>
+            </a:r>
+          </a:p>
+          <a:p>
+            <a:pPr>
+              <a:lnSpc>
+                <a:spcPct val="112000"/>
+              </a:lnSpc>
+              <a:spcAft>
+                <a:spcPts val="200"/>
+              </a:spcAft>
+            </a:pPr>
+            <a:r>
+              <a:rPr sz="1100" b="0">
+                <a:latin typeface="微软雅黑"/>
+                <a:ea typeface="微软雅黑"/>
+                <a:cs typeface="微软雅黑"/>
+              </a:rPr>
+              <a:t>③ 沉淀测试资产库（用例基线、检查清单、典型问题模式）；</a:t>
+            </a:r>
+          </a:p>
+          <a:p>
+            <a:pPr>
+              <a:lnSpc>
+                <a:spcPct val="112000"/>
+              </a:lnSpc>
+              <a:spcAft>
+                <a:spcPts val="200"/>
+              </a:spcAft>
+            </a:pPr>
+            <a:r>
+              <a:rPr sz="1100" b="0">
+                <a:latin typeface="微软雅黑"/>
+                <a:ea typeface="微软雅黑"/>
+                <a:cs typeface="微软雅黑"/>
+              </a:rPr>
+              <a:t>④ 设数据一致性专项：账号生命周期、订单与优惠券、跨端统计口径。</a:t>
+            </a:r>
+          </a:p>
+          <a:p>
+            <a:pPr>
+              <a:lnSpc>
+                <a:spcPct val="112000"/>
+              </a:lnSpc>
+              <a:spcAft>
+                <a:spcPts val="400"/>
+              </a:spcAft>
+            </a:pPr>
+          </a:p>
+          <a:p>
+            <a:pPr>
+              <a:lnSpc>
+                <a:spcPct val="112000"/>
+              </a:lnSpc>
+              <a:spcAft>
+                <a:spcPts val="200"/>
+              </a:spcAft>
+            </a:pPr>
+            <a:r>
+              <a:rPr sz="1200" b="1">
+                <a:latin typeface="微软雅黑"/>
+                <a:ea typeface="微软雅黑"/>
+                <a:cs typeface="微软雅黑"/>
+              </a:rPr>
+              <a:t>3　需要达成的工作目标</a:t>
+            </a:r>
+          </a:p>
+          <a:p>
+            <a:pPr>
+              <a:lnSpc>
+                <a:spcPct val="112000"/>
+              </a:lnSpc>
+              <a:spcAft>
+                <a:spcPts val="200"/>
+              </a:spcAft>
+            </a:pPr>
+            <a:r>
+              <a:rPr sz="1100" b="0">
+                <a:latin typeface="微软雅黑"/>
+                <a:ea typeface="微软雅黑"/>
+                <a:cs typeface="微软雅黑"/>
+              </a:rPr>
+              <a:t>① 冒烟测试脚本化，回归周期缩短 30%；</a:t>
+            </a:r>
+          </a:p>
+          <a:p>
+            <a:pPr>
+              <a:lnSpc>
+                <a:spcPct val="112000"/>
+              </a:lnSpc>
+              <a:spcAft>
+                <a:spcPts val="200"/>
+              </a:spcAft>
+            </a:pPr>
+            <a:r>
+              <a:rPr sz="1100" b="0">
+                <a:latin typeface="微软雅黑"/>
+                <a:ea typeface="微软雅黑"/>
+                <a:cs typeface="微软雅黑"/>
+              </a:rPr>
+              <a:t>② 严重及以上缺陷在提测后 24 小时内完成定位与复现确认；</a:t>
+            </a:r>
+          </a:p>
+          <a:p>
+            <a:pPr>
+              <a:lnSpc>
+                <a:spcPct val="112000"/>
+              </a:lnSpc>
+              <a:spcAft>
+                <a:spcPts val="200"/>
+              </a:spcAft>
+            </a:pPr>
+            <a:r>
+              <a:rPr sz="1100" b="0">
+                <a:latin typeface="微软雅黑"/>
+                <a:ea typeface="微软雅黑"/>
+                <a:cs typeface="微软雅黑"/>
+              </a:rPr>
+              <a:t>③ 关键模块用例覆盖率 100%，线上缺陷逃逸率明显下降。</a:t>
+            </a:r>
+          </a:p>
+          <a:p>
+            <a:pPr>
+              <a:lnSpc>
+                <a:spcPct val="112000"/>
+              </a:lnSpc>
+              <a:spcAft>
+                <a:spcPts val="400"/>
+              </a:spcAft>
+            </a:pPr>
+          </a:p>
+          <a:p>
+            <a:pPr>
+              <a:lnSpc>
+                <a:spcPct val="112000"/>
+              </a:lnSpc>
+              <a:spcAft>
+                <a:spcPts val="200"/>
+              </a:spcAft>
+            </a:pPr>
+            <a:r>
+              <a:rPr sz="1200" b="1">
+                <a:latin typeface="微软雅黑"/>
+                <a:ea typeface="微软雅黑"/>
+                <a:cs typeface="微软雅黑"/>
+              </a:rPr>
+              <a:t>4　个人成长与职业发展规划</a:t>
+            </a:r>
+          </a:p>
+          <a:p>
+            <a:pPr>
+              <a:lnSpc>
+                <a:spcPct val="112000"/>
+              </a:lnSpc>
+              <a:spcAft>
+                <a:spcPts val="200"/>
+              </a:spcAft>
+            </a:pPr>
+            <a:r>
+              <a:rPr sz="1100" b="0">
+                <a:latin typeface="微软雅黑"/>
+                <a:ea typeface="微软雅黑"/>
+                <a:cs typeface="微软雅黑"/>
+              </a:rPr>
+              <a:t>短期（6 个月）：掌握接口自动化框架与性能压测工具，能独立搭建并维护回归脚本；</a:t>
+            </a:r>
+          </a:p>
+          <a:p>
+            <a:pPr>
+              <a:lnSpc>
+                <a:spcPct val="112000"/>
+              </a:lnSpc>
+              <a:spcAft>
+                <a:spcPts val="200"/>
+              </a:spcAft>
+            </a:pPr>
+            <a:r>
+              <a:rPr sz="1100" b="0">
+                <a:latin typeface="微软雅黑"/>
+                <a:ea typeface="微软雅黑"/>
+                <a:cs typeface="微软雅黑"/>
+              </a:rPr>
+              <a:t>中期（12 个月）：具备独立负责一条业务线质量保障的能力，能主导测试方案设计与质量度量。</a:t>
+            </a:r>
           </a:p>
         </p:txBody>
       </p:sp>
@@ -15918,7 +16479,7 @@
                   <a:schemeClr val="bg1"/>
                 </a:solidFill>
               </a:rPr>
-              <a:t>XXX</a:t>
+              <a:t>谢仕杰</a:t>
             </a:r>
             <a:br>
               <a:rPr lang="en-US" altLang="zh-CN" sz="1800">
@@ -15956,7 +16517,7 @@
                   <a:schemeClr val="bg1"/>
                 </a:solidFill>
               </a:rPr>
-              <a:t>YYYY_MM_DD</a:t>
+              <a:t>2026_09_30</a:t>
             </a:r>
             <a:br>
               <a:rPr lang="en-US" altLang="zh-CN" sz="3200">
@@ -17964,6 +18525,329 @@
           </p:txBody>
         </p:sp>
       </p:grpSp>
+      <p:sp>
+        <p:nvSpPr>
+          <p:cNvPr id="33" name="TextBox 32"/>
+          <p:cNvSpPr txBox="1"/>
+          <p:nvPr/>
+        </p:nvSpPr>
+        <p:spPr>
+          <a:xfrm>
+            <a:off x="6096000" y="1549400"/>
+            <a:ext cx="5651500" cy="4445000"/>
+          </a:xfrm>
+          <a:prstGeom prst="rect">
+            <a:avLst/>
+          </a:prstGeom>
+          <a:noFill/>
+        </p:spPr>
+        <p:txBody>
+          <a:bodyPr wrap="square">
+            <a:spAutoFit/>
+          </a:bodyPr>
+          <a:lstStyle/>
+          <a:p>
+            <a:pPr>
+              <a:lnSpc>
+                <a:spcPct val="105000"/>
+              </a:lnSpc>
+              <a:spcAft>
+                <a:spcPts val="100"/>
+              </a:spcAft>
+            </a:pPr>
+            <a:r>
+              <a:rPr sz="1100" b="1">
+                <a:latin typeface="微软雅黑"/>
+                <a:ea typeface="微软雅黑"/>
+                <a:cs typeface="微软雅黑"/>
+              </a:rPr>
+              <a:t>01　个人简历</a:t>
+            </a:r>
+          </a:p>
+          <a:p>
+            <a:pPr>
+              <a:lnSpc>
+                <a:spcPct val="105000"/>
+              </a:lnSpc>
+              <a:spcAft>
+                <a:spcPts val="100"/>
+              </a:spcAft>
+            </a:pPr>
+            <a:r>
+              <a:rPr sz="1000" b="0">
+                <a:latin typeface="微软雅黑"/>
+                <a:ea typeface="微软雅黑"/>
+                <a:cs typeface="微软雅黑"/>
+              </a:rPr>
+              <a:t>谢仕杰 ｜ 测试工程师 ｜ 深圳</a:t>
+            </a:r>
+          </a:p>
+          <a:p>
+            <a:pPr>
+              <a:lnSpc>
+                <a:spcPct val="105000"/>
+              </a:lnSpc>
+              <a:spcAft>
+                <a:spcPts val="100"/>
+              </a:spcAft>
+            </a:pPr>
+            <a:r>
+              <a:rPr sz="1000" b="0">
+                <a:latin typeface="微软雅黑"/>
+                <a:ea typeface="微软雅黑"/>
+                <a:cs typeface="微软雅黑"/>
+              </a:rPr>
+              <a:t>试用期：2026年7月 — 2026年9月（3个月）</a:t>
+            </a:r>
+          </a:p>
+          <a:p>
+            <a:pPr>
+              <a:lnSpc>
+                <a:spcPct val="105000"/>
+              </a:lnSpc>
+              <a:spcAft>
+                <a:spcPts val="100"/>
+              </a:spcAft>
+            </a:pPr>
+            <a:r>
+              <a:rPr sz="1000" b="0">
+                <a:latin typeface="微软雅黑"/>
+                <a:ea typeface="微软雅黑"/>
+                <a:cs typeface="微软雅黑"/>
+              </a:rPr>
+              <a:t>负责「斯诺克大师」国内 App 的质量保障：需求评审、用例设计、冒烟与回归测试、缺陷跟踪闭环、发布前检查。</a:t>
+            </a:r>
+          </a:p>
+          <a:p>
+            <a:pPr>
+              <a:lnSpc>
+                <a:spcPct val="105000"/>
+              </a:lnSpc>
+              <a:spcAft>
+                <a:spcPts val="400"/>
+              </a:spcAft>
+            </a:pPr>
+          </a:p>
+          <a:p>
+            <a:pPr>
+              <a:lnSpc>
+                <a:spcPct val="105000"/>
+              </a:lnSpc>
+              <a:spcAft>
+                <a:spcPts val="100"/>
+              </a:spcAft>
+            </a:pPr>
+            <a:r>
+              <a:rPr sz="1100" b="1">
+                <a:latin typeface="微软雅黑"/>
+                <a:ea typeface="微软雅黑"/>
+                <a:cs typeface="微软雅黑"/>
+              </a:rPr>
+              <a:t>02　总体评价</a:t>
+            </a:r>
+          </a:p>
+          <a:p>
+            <a:pPr>
+              <a:lnSpc>
+                <a:spcPct val="105000"/>
+              </a:lnSpc>
+              <a:spcAft>
+                <a:spcPts val="100"/>
+              </a:spcAft>
+            </a:pPr>
+            <a:r>
+              <a:rPr sz="1000" b="0">
+                <a:latin typeface="微软雅黑"/>
+                <a:ea typeface="微软雅黑"/>
+                <a:cs typeface="微软雅黑"/>
+              </a:rPr>
+              <a:t>试用期内独立承担 v1.0.0、v1.0.1 两个迭代的测试工作，覆盖功能、兼容性、跨端一致性与数据正确性。</a:t>
+            </a:r>
+          </a:p>
+          <a:p>
+            <a:pPr>
+              <a:lnSpc>
+                <a:spcPct val="105000"/>
+              </a:lnSpc>
+              <a:spcAft>
+                <a:spcPts val="100"/>
+              </a:spcAft>
+            </a:pPr>
+            <a:r>
+              <a:rPr sz="1000" b="0">
+                <a:latin typeface="微软雅黑"/>
+                <a:ea typeface="微软雅黑"/>
+                <a:cs typeface="微软雅黑"/>
+              </a:rPr>
+              <a:t>缺陷定位不只停留在功能层，习惯追到数据库与接口层验证，多次发现表面通过但数据不一致的隐患。</a:t>
+            </a:r>
+          </a:p>
+          <a:p>
+            <a:pPr>
+              <a:lnSpc>
+                <a:spcPct val="105000"/>
+              </a:lnSpc>
+              <a:spcAft>
+                <a:spcPts val="400"/>
+              </a:spcAft>
+            </a:pPr>
+          </a:p>
+          <a:p>
+            <a:pPr>
+              <a:lnSpc>
+                <a:spcPct val="105000"/>
+              </a:lnSpc>
+              <a:spcAft>
+                <a:spcPts val="100"/>
+              </a:spcAft>
+            </a:pPr>
+            <a:r>
+              <a:rPr sz="1100" b="1">
+                <a:latin typeface="微软雅黑"/>
+                <a:ea typeface="微软雅黑"/>
+                <a:cs typeface="微软雅黑"/>
+              </a:rPr>
+              <a:t>03　存在改进机会点</a:t>
+            </a:r>
+          </a:p>
+          <a:p>
+            <a:pPr>
+              <a:lnSpc>
+                <a:spcPct val="105000"/>
+              </a:lnSpc>
+              <a:spcAft>
+                <a:spcPts val="100"/>
+              </a:spcAft>
+            </a:pPr>
+            <a:r>
+              <a:rPr sz="1000" b="0">
+                <a:latin typeface="微软雅黑"/>
+                <a:ea typeface="微软雅黑"/>
+                <a:cs typeface="微软雅黑"/>
+              </a:rPr>
+              <a:t>① 自动化测试覆盖不足，回归仍以手工为主，周期偏长；</a:t>
+            </a:r>
+          </a:p>
+          <a:p>
+            <a:pPr>
+              <a:lnSpc>
+                <a:spcPct val="105000"/>
+              </a:lnSpc>
+              <a:spcAft>
+                <a:spcPts val="100"/>
+              </a:spcAft>
+            </a:pPr>
+            <a:r>
+              <a:rPr sz="1000" b="0">
+                <a:latin typeface="微软雅黑"/>
+                <a:ea typeface="微软雅黑"/>
+                <a:cs typeface="微软雅黑"/>
+              </a:rPr>
+              <a:t>② 接口与服务端的验证介入偏晚，问题多在功能测试阶段才暴露；</a:t>
+            </a:r>
+          </a:p>
+          <a:p>
+            <a:pPr>
+              <a:lnSpc>
+                <a:spcPct val="105000"/>
+              </a:lnSpc>
+              <a:spcAft>
+                <a:spcPts val="100"/>
+              </a:spcAft>
+            </a:pPr>
+            <a:r>
+              <a:rPr sz="1000" b="0">
+                <a:latin typeface="微软雅黑"/>
+                <a:ea typeface="微软雅黑"/>
+                <a:cs typeface="微软雅黑"/>
+              </a:rPr>
+              <a:t>③ 跨端（App / 小程序 / 海外版）协同验证尚未形成固定机制。</a:t>
+            </a:r>
+          </a:p>
+          <a:p>
+            <a:pPr>
+              <a:lnSpc>
+                <a:spcPct val="105000"/>
+              </a:lnSpc>
+              <a:spcAft>
+                <a:spcPts val="400"/>
+              </a:spcAft>
+            </a:pPr>
+          </a:p>
+          <a:p>
+            <a:pPr>
+              <a:lnSpc>
+                <a:spcPct val="105000"/>
+              </a:lnSpc>
+              <a:spcAft>
+                <a:spcPts val="100"/>
+              </a:spcAft>
+            </a:pPr>
+            <a:r>
+              <a:rPr sz="1100" b="1">
+                <a:latin typeface="微软雅黑"/>
+                <a:ea typeface="微软雅黑"/>
+                <a:cs typeface="微软雅黑"/>
+              </a:rPr>
+              <a:t>04　自我发展需求</a:t>
+            </a:r>
+          </a:p>
+          <a:p>
+            <a:pPr>
+              <a:lnSpc>
+                <a:spcPct val="105000"/>
+              </a:lnSpc>
+              <a:spcAft>
+                <a:spcPts val="100"/>
+              </a:spcAft>
+            </a:pPr>
+            <a:r>
+              <a:rPr sz="1000" b="0">
+                <a:latin typeface="微软雅黑"/>
+                <a:ea typeface="微软雅黑"/>
+                <a:cs typeface="微软雅黑"/>
+              </a:rPr>
+              <a:t>① 补齐接口自动化与性能压测能力，缩短回归周期；</a:t>
+            </a:r>
+          </a:p>
+          <a:p>
+            <a:pPr>
+              <a:lnSpc>
+                <a:spcPct val="105000"/>
+              </a:lnSpc>
+              <a:spcAft>
+                <a:spcPts val="100"/>
+              </a:spcAft>
+            </a:pPr>
+            <a:r>
+              <a:rPr sz="1000" b="0">
+                <a:latin typeface="微软雅黑"/>
+                <a:ea typeface="微软雅黑"/>
+                <a:cs typeface="微软雅黑"/>
+              </a:rPr>
+              <a:t>② 深入业务数据链路，提升数据一致性测试的专业度；</a:t>
+            </a:r>
+          </a:p>
+          <a:p>
+            <a:pPr>
+              <a:lnSpc>
+                <a:spcPct val="105000"/>
+              </a:lnSpc>
+              <a:spcAft>
+                <a:spcPts val="100"/>
+              </a:spcAft>
+            </a:pPr>
+            <a:r>
+              <a:rPr sz="1000" b="0">
+                <a:latin typeface="微软雅黑"/>
+                <a:ea typeface="微软雅黑"/>
+                <a:cs typeface="微软雅黑"/>
+              </a:rPr>
+              <a:t>③ 提升需求阶段的风险识别能力，把质量问题前移。</a:t>
+            </a:r>
+          </a:p>
+        </p:txBody>
+      </p:sp>
     </p:spTree>
   </p:cSld>
   <p:clrMapOvr>
@@ -18061,43 +18945,21 @@
           <a:p>
             <a:pPr marL="285750" indent="-285750">
               <a:lnSpc>
-                <a:spcPct val="150000"/>
+                <a:spcPct val="108000"/>
               </a:lnSpc>
+              <a:spcAft>
+                <a:spcPts val="200"/>
+              </a:spcAft>
               <a:buFont typeface="Wingdings" panose="05000000000000000000" pitchFamily="2" charset="2"/>
               <a:buChar char="Ø"/>
             </a:pPr>
             <a:r>
-              <a:rPr lang="zh-CN" altLang="en-US" sz="2000" b="1" dirty="0" smtClean="0">
-                <a:solidFill>
-                  <a:srgbClr val="FF0000"/>
-                </a:solidFill>
-                <a:latin typeface="微软雅黑" panose="020B0503020204020204" charset="-122"/>
-                <a:ea typeface="微软雅黑" panose="020B0503020204020204" charset="-122"/>
-                <a:cs typeface="Times New Roman" panose="02020603050405020304" pitchFamily="18" charset="0"/>
+              <a:rPr sz="1100" b="1">
+                <a:latin typeface="微软雅黑"/>
+                <a:ea typeface="微软雅黑"/>
+                <a:cs typeface="微软雅黑"/>
               </a:rPr>
-              <a:t>罗列</a:t>
-            </a:r>
-            <a:r>
-              <a:rPr lang="zh-CN" altLang="en-US" sz="2000" b="1" dirty="0" smtClean="0">
-                <a:solidFill>
-                  <a:schemeClr val="bg1"/>
-                </a:solidFill>
-                <a:latin typeface="微软雅黑" panose="020B0503020204020204" charset="-122"/>
-                <a:ea typeface="微软雅黑" panose="020B0503020204020204" charset="-122"/>
-                <a:cs typeface="Times New Roman" panose="02020603050405020304" pitchFamily="18" charset="0"/>
-              </a:rPr>
-              <a:t>出几个</a:t>
-            </a:r>
-            <a:r>
-              <a:rPr lang="zh-CN" altLang="en-US" sz="2000" b="1" dirty="0" smtClean="0">
-                <a:solidFill>
-                  <a:srgbClr val="FF0000"/>
-                </a:solidFill>
-                <a:latin typeface="微软雅黑" panose="020B0503020204020204" charset="-122"/>
-                <a:ea typeface="微软雅黑" panose="020B0503020204020204" charset="-122"/>
-                <a:cs typeface="Times New Roman" panose="02020603050405020304" pitchFamily="18" charset="0"/>
-              </a:rPr>
-              <a:t>成果要点</a:t>
+              <a:t>1　迭代缺陷全生命周期跟进</a:t>
             </a:r>
             <a:endParaRPr lang="en-US" altLang="zh-CN" sz="2000" b="1" dirty="0" smtClean="0">
               <a:solidFill>
@@ -18111,365 +18973,272 @@
           <a:p>
             <a:pPr>
               <a:lnSpc>
-                <a:spcPct val="150000"/>
+                <a:spcPct val="108000"/>
               </a:lnSpc>
+              <a:spcAft>
+                <a:spcPts val="200"/>
+              </a:spcAft>
             </a:pPr>
             <a:r>
-              <a:rPr lang="zh-CN" altLang="en-US" sz="2000" dirty="0" smtClean="0">
-                <a:solidFill>
-                  <a:schemeClr val="bg1"/>
-                </a:solidFill>
-                <a:latin typeface="微软雅黑" panose="020B0503020204020204" charset="-122"/>
-                <a:ea typeface="微软雅黑" panose="020B0503020204020204" charset="-122"/>
+              <a:rPr sz="1000" b="0">
+                <a:latin typeface="微软雅黑"/>
+                <a:ea typeface="微软雅黑"/>
+                <a:cs typeface="微软雅黑"/>
               </a:rPr>
-              <a:t>建议</a:t>
+              <a:t>v1.0.0 迭代跟进缺陷 62 个，v1.0.1 迭代持续跟踪至收口；建立按严重等级与状态的分类跟进机制，个人独立承担，未出现长期挂起。</a:t>
             </a:r>
-            <a:r>
-              <a:rPr lang="zh-CN" altLang="en-US" sz="2000" dirty="0">
-                <a:solidFill>
-                  <a:schemeClr val="bg1"/>
-                </a:solidFill>
-                <a:latin typeface="微软雅黑" panose="020B0503020204020204" charset="-122"/>
-                <a:ea typeface="微软雅黑" panose="020B0503020204020204" charset="-122"/>
-              </a:rPr>
-              <a:t>要点不宜太多，</a:t>
-            </a:r>
-            <a:r>
-              <a:rPr lang="en-US" altLang="zh-CN" sz="2000" dirty="0">
-                <a:solidFill>
-                  <a:schemeClr val="bg1"/>
-                </a:solidFill>
-                <a:latin typeface="微软雅黑" panose="020B0503020204020204" charset="-122"/>
-                <a:ea typeface="微软雅黑" panose="020B0503020204020204" charset="-122"/>
-              </a:rPr>
-              <a:t>8</a:t>
-            </a:r>
-            <a:r>
-              <a:rPr lang="zh-CN" altLang="en-US" sz="2000" dirty="0">
-                <a:solidFill>
-                  <a:schemeClr val="bg1"/>
-                </a:solidFill>
-                <a:latin typeface="微软雅黑" panose="020B0503020204020204" charset="-122"/>
-                <a:ea typeface="微软雅黑" panose="020B0503020204020204" charset="-122"/>
-              </a:rPr>
-              <a:t>个</a:t>
-            </a:r>
-            <a:r>
-              <a:rPr lang="zh-CN" altLang="en-US" sz="2000" dirty="0" smtClean="0">
-                <a:solidFill>
-                  <a:schemeClr val="bg1"/>
-                </a:solidFill>
-                <a:latin typeface="微软雅黑" panose="020B0503020204020204" charset="-122"/>
-                <a:ea typeface="微软雅黑" panose="020B0503020204020204" charset="-122"/>
-              </a:rPr>
-              <a:t>以内</a:t>
-            </a:r>
-            <a:endParaRPr lang="en-US" altLang="zh-CN" sz="2000" dirty="0" smtClean="0">
-              <a:solidFill>
-                <a:schemeClr val="bg1"/>
-              </a:solidFill>
-              <a:latin typeface="微软雅黑" panose="020B0503020204020204" charset="-122"/>
-              <a:ea typeface="微软雅黑" panose="020B0503020204020204" charset="-122"/>
-            </a:endParaRPr>
           </a:p>
           <a:p>
             <a:pPr>
               <a:lnSpc>
-                <a:spcPct val="150000"/>
+                <a:spcPct val="108000"/>
               </a:lnSpc>
-            </a:pPr>
-            <a:endParaRPr lang="en-US" altLang="zh-CN" sz="2000" dirty="0">
-              <a:solidFill>
-                <a:schemeClr val="bg1"/>
-              </a:solidFill>
-            </a:endParaRPr>
-          </a:p>
-          <a:p>
-            <a:pPr marL="285750" indent="-285750">
-              <a:lnSpc>
-                <a:spcPct val="150000"/>
-              </a:lnSpc>
-              <a:buFont typeface="Wingdings" panose="05000000000000000000" pitchFamily="2" charset="2"/>
-              <a:buChar char="Ø"/>
+              <a:spcAft>
+                <a:spcPts val="200"/>
+              </a:spcAft>
             </a:pPr>
             <a:r>
-              <a:rPr lang="zh-CN" altLang="en-US" sz="2000" b="1" dirty="0" smtClean="0">
-                <a:solidFill>
-                  <a:schemeClr val="bg1"/>
-                </a:solidFill>
-                <a:latin typeface="微软雅黑" panose="020B0503020204020204" charset="-122"/>
-                <a:ea typeface="微软雅黑" panose="020B0503020204020204" charset="-122"/>
-                <a:cs typeface="Times New Roman" panose="02020603050405020304" pitchFamily="18" charset="0"/>
+              <a:rPr sz="1100" b="1">
+                <a:latin typeface="微软雅黑"/>
+                <a:ea typeface="微软雅黑"/>
+                <a:cs typeface="微软雅黑"/>
               </a:rPr>
-              <a:t>重点工作成果展开呈现</a:t>
+              <a:t>2　冒烟测试体系化</a:t>
             </a:r>
-            <a:endParaRPr lang="en-US" altLang="zh-CN" sz="2000" b="1" dirty="0" smtClean="0">
-              <a:solidFill>
-                <a:schemeClr val="bg1"/>
-              </a:solidFill>
-              <a:latin typeface="微软雅黑" panose="020B0503020204020204" charset="-122"/>
-              <a:ea typeface="微软雅黑" panose="020B0503020204020204" charset="-122"/>
-              <a:cs typeface="Times New Roman" panose="02020603050405020304" pitchFamily="18" charset="0"/>
-            </a:endParaRPr>
           </a:p>
           <a:p>
             <a:pPr>
               <a:lnSpc>
-                <a:spcPct val="150000"/>
+                <a:spcPct val="108000"/>
               </a:lnSpc>
+              <a:spcAft>
+                <a:spcPts val="200"/>
+              </a:spcAft>
             </a:pPr>
             <a:r>
-              <a:rPr lang="zh-CN" altLang="en-US" sz="2000" dirty="0">
-                <a:solidFill>
-                  <a:srgbClr val="FF0000"/>
-                </a:solidFill>
-                <a:latin typeface="微软雅黑" panose="020B0503020204020204" charset="-122"/>
-                <a:ea typeface="微软雅黑" panose="020B0503020204020204" charset="-122"/>
+              <a:rPr sz="1000" b="0">
+                <a:latin typeface="微软雅黑"/>
+                <a:ea typeface="微软雅黑"/>
+                <a:cs typeface="微软雅黑"/>
               </a:rPr>
-              <a:t>把</a:t>
+              <a:t>梳理 8 大核心模块、32 条冒烟用例，形成标准报告模板；另出 HTML 版邮件模板，解决报告粘贴到邮箱后排版错乱的问题，可直接复用。</a:t>
             </a:r>
-            <a:r>
-              <a:rPr lang="zh-CN" altLang="en-US" sz="2000" b="1" dirty="0">
-                <a:solidFill>
-                  <a:srgbClr val="FF0000"/>
-                </a:solidFill>
-                <a:latin typeface="微软雅黑" panose="020B0503020204020204" charset="-122"/>
-                <a:ea typeface="微软雅黑" panose="020B0503020204020204" charset="-122"/>
-              </a:rPr>
-              <a:t>成果要点展开</a:t>
-            </a:r>
-            <a:r>
-              <a:rPr lang="zh-CN" altLang="en-US" sz="2000" dirty="0">
-                <a:solidFill>
-                  <a:schemeClr val="bg1"/>
-                </a:solidFill>
-                <a:latin typeface="微软雅黑" panose="020B0503020204020204" charset="-122"/>
-                <a:ea typeface="微软雅黑" panose="020B0503020204020204" charset="-122"/>
-              </a:rPr>
-              <a:t>：具体做了什么，实现了什么</a:t>
-            </a:r>
-            <a:r>
-              <a:rPr lang="zh-CN" altLang="en-US" sz="2000" dirty="0" smtClean="0">
-                <a:solidFill>
-                  <a:schemeClr val="bg1"/>
-                </a:solidFill>
-                <a:latin typeface="微软雅黑" panose="020B0503020204020204" charset="-122"/>
-                <a:ea typeface="微软雅黑" panose="020B0503020204020204" charset="-122"/>
-              </a:rPr>
-              <a:t>成果。</a:t>
-            </a:r>
-            <a:endParaRPr lang="en-US" altLang="zh-CN" sz="2000" dirty="0" smtClean="0">
-              <a:solidFill>
-                <a:schemeClr val="bg1"/>
-              </a:solidFill>
-              <a:latin typeface="微软雅黑" panose="020B0503020204020204" charset="-122"/>
-              <a:ea typeface="微软雅黑" panose="020B0503020204020204" charset="-122"/>
-            </a:endParaRPr>
           </a:p>
           <a:p>
             <a:pPr>
               <a:lnSpc>
-                <a:spcPct val="150000"/>
+                <a:spcPct val="108000"/>
               </a:lnSpc>
+              <a:spcAft>
+                <a:spcPts val="200"/>
+              </a:spcAft>
             </a:pPr>
             <a:r>
-              <a:rPr lang="zh-CN" altLang="en-US" sz="2000" dirty="0" smtClean="0">
-                <a:solidFill>
-                  <a:schemeClr val="bg1"/>
-                </a:solidFill>
-                <a:latin typeface="微软雅黑" panose="020B0503020204020204" charset="-122"/>
-                <a:ea typeface="微软雅黑" panose="020B0503020204020204" charset="-122"/>
+              <a:rPr sz="1100" b="1">
+                <a:latin typeface="微软雅黑"/>
+                <a:ea typeface="微软雅黑"/>
+                <a:cs typeface="微软雅黑"/>
               </a:rPr>
-              <a:t>可以</a:t>
+              <a:t>3　账号注销数据残留深度排查（亮点）</a:t>
             </a:r>
-            <a:r>
-              <a:rPr lang="zh-CN" altLang="en-US" sz="2000" dirty="0">
-                <a:solidFill>
-                  <a:schemeClr val="bg1"/>
-                </a:solidFill>
-                <a:latin typeface="微软雅黑" panose="020B0503020204020204" charset="-122"/>
-                <a:ea typeface="微软雅黑" panose="020B0503020204020204" charset="-122"/>
-              </a:rPr>
-              <a:t>是具体</a:t>
-            </a:r>
-            <a:r>
-              <a:rPr lang="zh-CN" altLang="en-US" sz="2000" dirty="0" smtClean="0">
-                <a:solidFill>
-                  <a:schemeClr val="bg1"/>
-                </a:solidFill>
-                <a:latin typeface="微软雅黑" panose="020B0503020204020204" charset="-122"/>
-                <a:ea typeface="微软雅黑" panose="020B0503020204020204" charset="-122"/>
-              </a:rPr>
-              <a:t>数字，可以</a:t>
-            </a:r>
-            <a:r>
-              <a:rPr lang="zh-CN" altLang="en-US" sz="2000" dirty="0">
-                <a:solidFill>
-                  <a:schemeClr val="bg1"/>
-                </a:solidFill>
-                <a:latin typeface="微软雅黑" panose="020B0503020204020204" charset="-122"/>
-                <a:ea typeface="微软雅黑" panose="020B0503020204020204" charset="-122"/>
-              </a:rPr>
-              <a:t>是出了什么制度、流程、杂志、策划了什么活动</a:t>
-            </a:r>
-            <a:r>
-              <a:rPr lang="zh-CN" altLang="en-US" sz="2000" dirty="0" smtClean="0">
-                <a:solidFill>
-                  <a:schemeClr val="bg1"/>
-                </a:solidFill>
-                <a:latin typeface="微软雅黑" panose="020B0503020204020204" charset="-122"/>
-                <a:ea typeface="微软雅黑" panose="020B0503020204020204" charset="-122"/>
-              </a:rPr>
-              <a:t>等，也</a:t>
-            </a:r>
-            <a:r>
-              <a:rPr lang="zh-CN" altLang="en-US" sz="2000" dirty="0">
-                <a:solidFill>
-                  <a:schemeClr val="bg1"/>
-                </a:solidFill>
-                <a:latin typeface="微软雅黑" panose="020B0503020204020204" charset="-122"/>
-                <a:ea typeface="微软雅黑" panose="020B0503020204020204" charset="-122"/>
-              </a:rPr>
-              <a:t>可以附上</a:t>
-            </a:r>
-            <a:r>
-              <a:rPr lang="zh-CN" altLang="en-US" sz="2000" dirty="0" smtClean="0">
-                <a:solidFill>
-                  <a:schemeClr val="bg1"/>
-                </a:solidFill>
-                <a:latin typeface="微软雅黑" panose="020B0503020204020204" charset="-122"/>
-                <a:ea typeface="微软雅黑" panose="020B0503020204020204" charset="-122"/>
-              </a:rPr>
-              <a:t>图片</a:t>
-            </a:r>
-            <a:endParaRPr lang="en-US" altLang="zh-CN" sz="2000" dirty="0" smtClean="0">
-              <a:solidFill>
-                <a:schemeClr val="bg1"/>
-              </a:solidFill>
-              <a:latin typeface="微软雅黑" panose="020B0503020204020204" charset="-122"/>
-              <a:ea typeface="微软雅黑" panose="020B0503020204020204" charset="-122"/>
-            </a:endParaRPr>
           </a:p>
           <a:p>
             <a:pPr>
               <a:lnSpc>
-                <a:spcPct val="150000"/>
+                <a:spcPct val="108000"/>
               </a:lnSpc>
-            </a:pPr>
-            <a:endParaRPr lang="en-US" altLang="zh-CN" sz="2000" dirty="0">
-              <a:solidFill>
-                <a:schemeClr val="bg1"/>
-              </a:solidFill>
-            </a:endParaRPr>
-          </a:p>
-          <a:p>
-            <a:pPr marL="285750" indent="-285750">
-              <a:lnSpc>
-                <a:spcPct val="150000"/>
-              </a:lnSpc>
-              <a:buFont typeface="Wingdings" panose="05000000000000000000" pitchFamily="2" charset="2"/>
-              <a:buChar char="Ø"/>
+              <a:spcAft>
+                <a:spcPts val="200"/>
+              </a:spcAft>
             </a:pPr>
             <a:r>
-              <a:rPr lang="zh-CN" altLang="en-US" sz="2000" b="1" dirty="0">
-                <a:solidFill>
-                  <a:srgbClr val="FF0000"/>
-                </a:solidFill>
-                <a:latin typeface="微软雅黑" panose="020B0503020204020204" charset="-122"/>
-                <a:ea typeface="微软雅黑" panose="020B0503020204020204" charset="-122"/>
-                <a:cs typeface="Times New Roman" panose="02020603050405020304" pitchFamily="18" charset="0"/>
+              <a:rPr sz="1000" b="0">
+                <a:latin typeface="微软雅黑"/>
+                <a:ea typeface="微软雅黑"/>
+                <a:cs typeface="微软雅黑"/>
               </a:rPr>
-              <a:t>有些成果，能够同时展现</a:t>
+              <a:t>功能层已提示注销成功，我追到数据库比对 5 张关联表，发现 video_order 残留 68 条、video_coupon_record 5 条、token 未失效等问题；并定位到同一 open_id 反复注册产生 17 个 user_id 的数据割裂风险。</a:t>
             </a:r>
-            <a:r>
-              <a:rPr lang="en-US" altLang="zh-CN" sz="2000" b="1" dirty="0">
-                <a:solidFill>
-                  <a:srgbClr val="FF0000"/>
-                </a:solidFill>
-                <a:latin typeface="微软雅黑" panose="020B0503020204020204" charset="-122"/>
-                <a:ea typeface="微软雅黑" panose="020B0503020204020204" charset="-122"/>
-                <a:cs typeface="Times New Roman" panose="02020603050405020304" pitchFamily="18" charset="0"/>
-              </a:rPr>
-              <a:t>5</a:t>
-            </a:r>
-            <a:r>
-              <a:rPr lang="zh-CN" altLang="en-US" sz="2000" b="1" dirty="0">
-                <a:solidFill>
-                  <a:srgbClr val="FF0000"/>
-                </a:solidFill>
-                <a:latin typeface="微软雅黑" panose="020B0503020204020204" charset="-122"/>
-                <a:ea typeface="微软雅黑" panose="020B0503020204020204" charset="-122"/>
-                <a:cs typeface="Times New Roman" panose="02020603050405020304" pitchFamily="18" charset="0"/>
-              </a:rPr>
-              <a:t>大能力中的几项</a:t>
-            </a:r>
-            <a:r>
-              <a:rPr lang="zh-CN" altLang="en-US" sz="2000" b="1" dirty="0" smtClean="0">
-                <a:solidFill>
-                  <a:srgbClr val="FF0000"/>
-                </a:solidFill>
-                <a:latin typeface="微软雅黑" panose="020B0503020204020204" charset="-122"/>
-                <a:ea typeface="微软雅黑" panose="020B0503020204020204" charset="-122"/>
-                <a:cs typeface="Times New Roman" panose="02020603050405020304" pitchFamily="18" charset="0"/>
-              </a:rPr>
-              <a:t>，在</a:t>
-            </a:r>
-            <a:r>
-              <a:rPr lang="zh-CN" altLang="en-US" sz="2000" b="1" dirty="0">
-                <a:solidFill>
-                  <a:srgbClr val="FF0000"/>
-                </a:solidFill>
-                <a:latin typeface="微软雅黑" panose="020B0503020204020204" charset="-122"/>
-                <a:ea typeface="微软雅黑" panose="020B0503020204020204" charset="-122"/>
-                <a:cs typeface="Times New Roman" panose="02020603050405020304" pitchFamily="18" charset="0"/>
-              </a:rPr>
-              <a:t>此处提炼总结即可，不需详细展开，在进行</a:t>
-            </a:r>
-            <a:r>
-              <a:rPr lang="en-US" altLang="zh-CN" sz="2000" b="1" dirty="0">
-                <a:solidFill>
-                  <a:srgbClr val="FF0000"/>
-                </a:solidFill>
-                <a:latin typeface="微软雅黑" panose="020B0503020204020204" charset="-122"/>
-                <a:ea typeface="微软雅黑" panose="020B0503020204020204" charset="-122"/>
-                <a:cs typeface="Times New Roman" panose="02020603050405020304" pitchFamily="18" charset="0"/>
-              </a:rPr>
-              <a:t>5</a:t>
-            </a:r>
-            <a:r>
-              <a:rPr lang="zh-CN" altLang="en-US" sz="2000" b="1" dirty="0">
-                <a:solidFill>
-                  <a:srgbClr val="FF0000"/>
-                </a:solidFill>
-                <a:latin typeface="微软雅黑" panose="020B0503020204020204" charset="-122"/>
-                <a:ea typeface="微软雅黑" panose="020B0503020204020204" charset="-122"/>
-                <a:cs typeface="Times New Roman" panose="02020603050405020304" pitchFamily="18" charset="0"/>
-              </a:rPr>
-              <a:t>大能力自评时进行呈现。</a:t>
-            </a:r>
-            <a:endParaRPr lang="en-US" altLang="zh-CN" sz="2000" b="1" dirty="0">
-              <a:solidFill>
-                <a:srgbClr val="FF0000"/>
-              </a:solidFill>
-              <a:latin typeface="微软雅黑" panose="020B0503020204020204" charset="-122"/>
-              <a:ea typeface="微软雅黑" panose="020B0503020204020204" charset="-122"/>
-              <a:cs typeface="Times New Roman" panose="02020603050405020304" pitchFamily="18" charset="0"/>
-            </a:endParaRPr>
           </a:p>
           <a:p>
             <a:pPr>
               <a:lnSpc>
-                <a:spcPct val="120000"/>
+                <a:spcPct val="108000"/>
               </a:lnSpc>
+              <a:spcAft>
+                <a:spcPts val="200"/>
+              </a:spcAft>
             </a:pPr>
-            <a:endParaRPr lang="en-US" altLang="zh-CN" sz="2000" b="1" dirty="0">
-              <a:solidFill>
-                <a:srgbClr val="FF0000"/>
-              </a:solidFill>
-              <a:latin typeface="微软雅黑" panose="020B0503020204020204" charset="-122"/>
-              <a:ea typeface="微软雅黑" panose="020B0503020204020204" charset="-122"/>
-              <a:cs typeface="Times New Roman" panose="02020603050405020304" pitchFamily="18" charset="0"/>
-            </a:endParaRPr>
+            <a:r>
+              <a:rPr sz="1100" b="1">
+                <a:latin typeface="微软雅黑"/>
+                <a:ea typeface="微软雅黑"/>
+                <a:cs typeface="微软雅黑"/>
+              </a:rPr>
+              <a:t>4　跨端统计口径统一（亮点）</a:t>
+            </a:r>
+          </a:p>
+          <a:p>
+            <a:pPr>
+              <a:lnSpc>
+                <a:spcPct val="108000"/>
+              </a:lnSpc>
+              <a:spcAft>
+                <a:spcPts val="200"/>
+              </a:spcAft>
+            </a:pPr>
+            <a:r>
+              <a:rPr sz="1000" b="0">
+                <a:latin typeface="微软雅黑"/>
+                <a:ea typeface="微软雅黑"/>
+                <a:cs typeface="微软雅黑"/>
+              </a:rPr>
+              <a:t>将 App「场统计/技术统计」数值不一致与小程序平均犯规恒为 0 两个缺陷归并为同一根因，与产品对齐后确定 3 个字段统一保留一位小数，推动三端交叉验证后闭环。</a:t>
+            </a:r>
+          </a:p>
+          <a:p>
+            <a:pPr>
+              <a:lnSpc>
+                <a:spcPct val="108000"/>
+              </a:lnSpc>
+              <a:spcAft>
+                <a:spcPts val="200"/>
+              </a:spcAft>
+            </a:pPr>
+            <a:r>
+              <a:rPr sz="1100" b="1">
+                <a:latin typeface="微软雅黑"/>
+                <a:ea typeface="微软雅黑"/>
+                <a:cs typeface="微软雅黑"/>
+              </a:rPr>
+              <a:t>5　缺陷同步自动化</a:t>
+            </a:r>
+          </a:p>
+          <a:p>
+            <a:pPr>
+              <a:lnSpc>
+                <a:spcPct val="108000"/>
+              </a:lnSpc>
+              <a:spcAft>
+                <a:spcPts val="200"/>
+              </a:spcAft>
+            </a:pPr>
+            <a:r>
+              <a:rPr sz="1000" b="0">
+                <a:latin typeface="微软雅黑"/>
+                <a:ea typeface="微软雅黑"/>
+                <a:cs typeface="微软雅黑"/>
+              </a:rPr>
+              <a:t>将 TAPD 缺陷查询与汇总脚本化，配置每天 16:00 自动向企微推送当日待办简报，替代人工逐条筛选整理。</a:t>
+            </a:r>
+          </a:p>
+          <a:p>
+            <a:pPr>
+              <a:lnSpc>
+                <a:spcPct val="108000"/>
+              </a:lnSpc>
+              <a:spcAft>
+                <a:spcPts val="200"/>
+              </a:spcAft>
+            </a:pPr>
+            <a:r>
+              <a:rPr sz="1100" b="1">
+                <a:latin typeface="微软雅黑"/>
+                <a:ea typeface="微软雅黑"/>
+                <a:cs typeface="微软雅黑"/>
+              </a:rPr>
+              <a:t>6　生产与海外版遗留问题专项清理</a:t>
+            </a:r>
+          </a:p>
+          <a:p>
+            <a:pPr>
+              <a:lnSpc>
+                <a:spcPct val="108000"/>
+              </a:lnSpc>
+              <a:spcAft>
+                <a:spcPts val="200"/>
+              </a:spcAft>
+            </a:pPr>
+            <a:r>
+              <a:rPr sz="1000" b="0">
+                <a:latin typeface="微软雅黑"/>
+                <a:ea typeface="微软雅黑"/>
+                <a:cs typeface="微软雅黑"/>
+              </a:rPr>
+              <a:t>集中清理历史遗留缺陷，推动跨版本问题的责任划分与收口，避免遗留问题滚入下一迭代。</a:t>
+            </a:r>
+          </a:p>
+          <a:p>
+            <a:pPr>
+              <a:lnSpc>
+                <a:spcPct val="108000"/>
+              </a:lnSpc>
+              <a:spcAft>
+                <a:spcPts val="200"/>
+              </a:spcAft>
+            </a:pPr>
+            <a:r>
+              <a:rPr sz="1100" b="1">
+                <a:latin typeface="微软雅黑"/>
+                <a:ea typeface="微软雅黑"/>
+                <a:cs typeface="微软雅黑"/>
+              </a:rPr>
+              <a:t>7　测试资产沉淀</a:t>
+            </a:r>
+          </a:p>
+          <a:p>
+            <a:pPr>
+              <a:lnSpc>
+                <a:spcPct val="108000"/>
+              </a:lnSpc>
+              <a:spcAft>
+                <a:spcPts val="200"/>
+              </a:spcAft>
+            </a:pPr>
+            <a:r>
+              <a:rPr sz="1000" b="0">
+                <a:latin typeface="微软雅黑"/>
+                <a:ea typeface="微软雅黑"/>
+                <a:cs typeface="微软雅黑"/>
+              </a:rPr>
+              <a:t>输出测试用例、缺陷描述、冒烟/回归/发布检查清单、邮件报告等多套模板，供团队直接复用，统一输出口径。</a:t>
+            </a:r>
+          </a:p>
+          <a:p>
+            <a:pPr>
+              <a:lnSpc>
+                <a:spcPct val="108000"/>
+              </a:lnSpc>
+              <a:spcAft>
+                <a:spcPts val="200"/>
+              </a:spcAft>
+            </a:pPr>
+            <a:r>
+              <a:rPr sz="1100" b="1">
+                <a:latin typeface="微软雅黑"/>
+                <a:ea typeface="微软雅黑"/>
+                <a:cs typeface="微软雅黑"/>
+              </a:rPr>
+              <a:t>8　个人在团队中的角色</a:t>
+            </a:r>
+          </a:p>
+          <a:p>
+            <a:pPr>
+              <a:lnSpc>
+                <a:spcPct val="108000"/>
+              </a:lnSpc>
+              <a:spcAft>
+                <a:spcPts val="200"/>
+              </a:spcAft>
+            </a:pPr>
+            <a:r>
+              <a:rPr sz="1000" b="0">
+                <a:latin typeface="微软雅黑"/>
+                <a:ea typeface="微软雅黑"/>
+                <a:cs typeface="微软雅黑"/>
+              </a:rPr>
+              <a:t>上述工作均由本人独立承担：需求评审参与、用例设计与执行、缺陷定位与跟踪、回归验证、发布前检查全程负责；跨端口径类问题由本人发起并组织产品、开发对齐。</a:t>
+            </a:r>
           </a:p>
         </p:txBody>
       </p:sp>
@@ -19330,37 +20099,9 @@
                       </a:lvl9pPr>
                     </a:lstStyle>
                     <a:p>
-                      <a:pPr marL="0" marR="0" lvl="0" indent="0" algn="ctr" defTabSz="914400" rtl="0" eaLnBrk="1" fontAlgn="base" latinLnBrk="0" hangingPunct="1">
-                        <a:lnSpc>
-                          <a:spcPct val="150000"/>
-                        </a:lnSpc>
-                        <a:spcBef>
-                          <a:spcPct val="0"/>
-                        </a:spcBef>
-                        <a:spcAft>
-                          <a:spcPct val="0"/>
-                        </a:spcAft>
-                        <a:buClrTx/>
-                        <a:buSzTx/>
-                        <a:buFontTx/>
-                        <a:buNone/>
-                        <a:defRPr/>
-                      </a:pPr>
                       <a:r>
-                        <a:rPr kumimoji="0" lang="zh-CN" altLang="en-US" sz="2400" u="none" strike="noStrike" cap="none" normalizeH="0" baseline="0" dirty="0" smtClean="0">
-                          <a:ln>
-                            <a:noFill/>
-                          </a:ln>
-                          <a:effectLst/>
-                        </a:rPr>
                         <a:t>√</a:t>
                       </a:r>
-                      <a:endParaRPr kumimoji="0" lang="zh-CN" altLang="en-US" sz="2400" u="none" strike="noStrike" cap="none" normalizeH="0" baseline="0" dirty="0" smtClean="0">
-                        <a:ln>
-                          <a:noFill/>
-                        </a:ln>
-                        <a:effectLst/>
-                      </a:endParaRPr>
                     </a:p>
                   </a:txBody>
                   <a:tcPr marL="91435" marR="91435" marT="45725" marB="45725" anchor="ctr" horzOverflow="overflow"/>
@@ -19499,29 +20240,7 @@
                         </a:defRPr>
                       </a:lvl9pPr>
                     </a:lstStyle>
-                    <a:p>
-                      <a:pPr marL="0" marR="0" lvl="0" indent="0" algn="ctr" defTabSz="914400" rtl="0" eaLnBrk="1" fontAlgn="base" latinLnBrk="0" hangingPunct="1">
-                        <a:lnSpc>
-                          <a:spcPct val="150000"/>
-                        </a:lnSpc>
-                        <a:spcBef>
-                          <a:spcPct val="0"/>
-                        </a:spcBef>
-                        <a:spcAft>
-                          <a:spcPct val="0"/>
-                        </a:spcAft>
-                        <a:buClrTx/>
-                        <a:buSzTx/>
-                        <a:buFontTx/>
-                        <a:buNone/>
-                      </a:pPr>
-                      <a:endParaRPr kumimoji="0" lang="zh-CN" altLang="en-US" sz="2400" u="none" strike="noStrike" cap="none" normalizeH="0" baseline="0" smtClean="0">
-                        <a:ln>
-                          <a:noFill/>
-                        </a:ln>
-                        <a:effectLst/>
-                      </a:endParaRPr>
-                    </a:p>
+                    <a:p/>
                   </a:txBody>
                   <a:tcPr marL="91435" marR="91435" marT="45725" marB="45725" anchor="ctr" horzOverflow="overflow"/>
                 </a:tc>
@@ -19830,29 +20549,7 @@
                         </a:defRPr>
                       </a:lvl9pPr>
                     </a:lstStyle>
-                    <a:p>
-                      <a:pPr marL="0" marR="0" lvl="0" indent="0" algn="ctr" defTabSz="914400" rtl="0" eaLnBrk="1" fontAlgn="base" latinLnBrk="0" hangingPunct="1">
-                        <a:lnSpc>
-                          <a:spcPct val="150000"/>
-                        </a:lnSpc>
-                        <a:spcBef>
-                          <a:spcPct val="0"/>
-                        </a:spcBef>
-                        <a:spcAft>
-                          <a:spcPct val="0"/>
-                        </a:spcAft>
-                        <a:buClrTx/>
-                        <a:buSzTx/>
-                        <a:buFontTx/>
-                        <a:buNone/>
-                      </a:pPr>
-                      <a:endParaRPr kumimoji="0" lang="en-US" altLang="zh-CN" sz="2400" u="none" strike="noStrike" cap="none" normalizeH="0" baseline="0" dirty="0" smtClean="0">
-                        <a:ln>
-                          <a:noFill/>
-                        </a:ln>
-                        <a:effectLst/>
-                      </a:endParaRPr>
-                    </a:p>
+                    <a:p/>
                   </a:txBody>
                   <a:tcPr marL="91435" marR="91435" marT="45725" marB="45725" anchor="ctr" horzOverflow="overflow"/>
                 </a:tc>
@@ -19991,37 +20688,9 @@
                       </a:lvl9pPr>
                     </a:lstStyle>
                     <a:p>
-                      <a:pPr marL="0" marR="0" lvl="0" indent="0" algn="ctr" defTabSz="914400" rtl="0" eaLnBrk="1" fontAlgn="base" latinLnBrk="0" hangingPunct="1">
-                        <a:lnSpc>
-                          <a:spcPct val="150000"/>
-                        </a:lnSpc>
-                        <a:spcBef>
-                          <a:spcPct val="0"/>
-                        </a:spcBef>
-                        <a:spcAft>
-                          <a:spcPct val="0"/>
-                        </a:spcAft>
-                        <a:buClrTx/>
-                        <a:buSzTx/>
-                        <a:buFontTx/>
-                        <a:buNone/>
-                        <a:defRPr/>
-                      </a:pPr>
                       <a:r>
-                        <a:rPr kumimoji="0" lang="zh-CN" altLang="en-US" sz="2400" u="none" strike="noStrike" cap="none" normalizeH="0" baseline="0" dirty="0" smtClean="0">
-                          <a:ln>
-                            <a:noFill/>
-                          </a:ln>
-                          <a:effectLst/>
-                        </a:rPr>
                         <a:t>√</a:t>
                       </a:r>
-                      <a:endParaRPr kumimoji="0" lang="zh-CN" altLang="en-US" sz="2400" u="none" strike="noStrike" cap="none" normalizeH="0" baseline="0" dirty="0" smtClean="0">
-                        <a:ln>
-                          <a:noFill/>
-                        </a:ln>
-                        <a:effectLst/>
-                      </a:endParaRPr>
                     </a:p>
                   </a:txBody>
                   <a:tcPr marL="91435" marR="91435" marT="45725" marB="45725" anchor="ctr" horzOverflow="overflow"/>
@@ -20332,27 +21001,9 @@
                       </a:lvl9pPr>
                     </a:lstStyle>
                     <a:p>
-                      <a:pPr marL="0" marR="0" lvl="0" indent="0" algn="ctr" defTabSz="914400" rtl="0" eaLnBrk="1" fontAlgn="base" latinLnBrk="0" hangingPunct="1">
-                        <a:lnSpc>
-                          <a:spcPct val="150000"/>
-                        </a:lnSpc>
-                        <a:spcBef>
-                          <a:spcPct val="0"/>
-                        </a:spcBef>
-                        <a:spcAft>
-                          <a:spcPct val="0"/>
-                        </a:spcAft>
-                        <a:buClrTx/>
-                        <a:buSzTx/>
-                        <a:buFontTx/>
-                        <a:buNone/>
-                      </a:pPr>
-                      <a:endParaRPr kumimoji="0" lang="zh-CN" altLang="en-US" sz="2400" u="none" strike="noStrike" cap="none" normalizeH="0" baseline="0" dirty="0" smtClean="0">
-                        <a:ln>
-                          <a:noFill/>
-                        </a:ln>
-                        <a:effectLst/>
-                      </a:endParaRPr>
+                      <a:r>
+                        <a:t>√</a:t>
+                      </a:r>
                     </a:p>
                   </a:txBody>
                   <a:tcPr marL="91435" marR="91435" marT="45725" marB="45725" anchor="ctr" horzOverflow="overflow"/>
@@ -20491,39 +21142,7 @@
                         </a:defRPr>
                       </a:lvl9pPr>
                     </a:lstStyle>
-                    <a:p>
-                      <a:pPr marL="0" marR="0" lvl="0" indent="0" algn="ctr" defTabSz="914400" rtl="0" eaLnBrk="1" fontAlgn="base" latinLnBrk="0" hangingPunct="1">
-                        <a:lnSpc>
-                          <a:spcPct val="150000"/>
-                        </a:lnSpc>
-                        <a:spcBef>
-                          <a:spcPct val="0"/>
-                        </a:spcBef>
-                        <a:spcAft>
-                          <a:spcPct val="0"/>
-                        </a:spcAft>
-                        <a:buClrTx/>
-                        <a:buSzTx/>
-                        <a:buFontTx/>
-                        <a:buNone/>
-                        <a:defRPr/>
-                      </a:pPr>
-                      <a:r>
-                        <a:rPr kumimoji="0" lang="zh-CN" altLang="en-US" sz="2400" u="none" strike="noStrike" cap="none" normalizeH="0" baseline="0" dirty="0" smtClean="0">
-                          <a:ln>
-                            <a:noFill/>
-                          </a:ln>
-                          <a:effectLst/>
-                        </a:rPr>
-                        <a:t>√</a:t>
-                      </a:r>
-                      <a:endParaRPr kumimoji="0" lang="zh-CN" altLang="en-US" sz="2400" u="none" strike="noStrike" cap="none" normalizeH="0" baseline="0" dirty="0" smtClean="0">
-                        <a:ln>
-                          <a:noFill/>
-                        </a:ln>
-                        <a:effectLst/>
-                      </a:endParaRPr>
-                    </a:p>
+                    <a:p/>
                   </a:txBody>
                   <a:tcPr marL="91435" marR="91435" marT="45725" marB="45725" anchor="ctr" horzOverflow="overflow"/>
                 </a:tc>
@@ -20832,39 +21451,7 @@
                         </a:defRPr>
                       </a:lvl9pPr>
                     </a:lstStyle>
-                    <a:p>
-                      <a:pPr marL="0" marR="0" lvl="0" indent="0" algn="ctr" defTabSz="914400" rtl="0" eaLnBrk="1" fontAlgn="base" latinLnBrk="0" hangingPunct="1">
-                        <a:lnSpc>
-                          <a:spcPct val="150000"/>
-                        </a:lnSpc>
-                        <a:spcBef>
-                          <a:spcPct val="0"/>
-                        </a:spcBef>
-                        <a:spcAft>
-                          <a:spcPct val="0"/>
-                        </a:spcAft>
-                        <a:buClrTx/>
-                        <a:buSzTx/>
-                        <a:buFontTx/>
-                        <a:buNone/>
-                        <a:defRPr/>
-                      </a:pPr>
-                      <a:r>
-                        <a:rPr kumimoji="0" lang="en-US" altLang="zh-CN" sz="2400" u="none" strike="noStrike" cap="none" normalizeH="0" baseline="0" dirty="0" smtClean="0">
-                          <a:ln>
-                            <a:noFill/>
-                          </a:ln>
-                          <a:effectLst/>
-                        </a:rPr>
-                        <a:t>…</a:t>
-                      </a:r>
-                      <a:endParaRPr kumimoji="0" lang="en-US" altLang="zh-CN" sz="2400" u="none" strike="noStrike" cap="none" normalizeH="0" baseline="0" dirty="0" smtClean="0">
-                        <a:ln>
-                          <a:noFill/>
-                        </a:ln>
-                        <a:effectLst/>
-                      </a:endParaRPr>
-                    </a:p>
+                    <a:p/>
                   </a:txBody>
                   <a:tcPr marL="91435" marR="91435" marT="45725" marB="45725" anchor="ctr" horzOverflow="overflow"/>
                 </a:tc>
@@ -21003,36 +21590,9 @@
                       </a:lvl9pPr>
                     </a:lstStyle>
                     <a:p>
-                      <a:pPr marL="0" marR="0" lvl="0" indent="0" algn="ctr" defTabSz="914400" rtl="0" eaLnBrk="1" fontAlgn="base" latinLnBrk="0" hangingPunct="1">
-                        <a:lnSpc>
-                          <a:spcPct val="150000"/>
-                        </a:lnSpc>
-                        <a:spcBef>
-                          <a:spcPct val="0"/>
-                        </a:spcBef>
-                        <a:spcAft>
-                          <a:spcPct val="0"/>
-                        </a:spcAft>
-                        <a:buClrTx/>
-                        <a:buSzTx/>
-                        <a:buFontTx/>
-                        <a:buNone/>
-                      </a:pPr>
                       <a:r>
-                        <a:rPr kumimoji="0" lang="en-US" altLang="zh-CN" sz="2400" u="none" strike="noStrike" cap="none" normalizeH="0" baseline="0" dirty="0" smtClean="0">
-                          <a:ln>
-                            <a:noFill/>
-                          </a:ln>
-                          <a:effectLst/>
-                        </a:rPr>
-                        <a:t>…</a:t>
+                        <a:t>√</a:t>
                       </a:r>
-                      <a:endParaRPr kumimoji="0" lang="en-US" altLang="zh-CN" sz="2400" u="none" strike="noStrike" cap="none" normalizeH="0" baseline="0" dirty="0" smtClean="0">
-                        <a:ln>
-                          <a:noFill/>
-                        </a:ln>
-                        <a:effectLst/>
-                      </a:endParaRPr>
                     </a:p>
                   </a:txBody>
                   <a:tcPr marL="91435" marR="91435" marT="45725" marB="45725" anchor="ctr" horzOverflow="overflow"/>
@@ -21342,39 +21902,7 @@
                         </a:defRPr>
                       </a:lvl9pPr>
                     </a:lstStyle>
-                    <a:p>
-                      <a:pPr marL="0" marR="0" lvl="0" indent="0" algn="ctr" defTabSz="914400" rtl="0" eaLnBrk="1" fontAlgn="base" latinLnBrk="0" hangingPunct="1">
-                        <a:lnSpc>
-                          <a:spcPct val="150000"/>
-                        </a:lnSpc>
-                        <a:spcBef>
-                          <a:spcPct val="0"/>
-                        </a:spcBef>
-                        <a:spcAft>
-                          <a:spcPct val="0"/>
-                        </a:spcAft>
-                        <a:buClrTx/>
-                        <a:buSzTx/>
-                        <a:buFontTx/>
-                        <a:buNone/>
-                        <a:defRPr/>
-                      </a:pPr>
-                      <a:r>
-                        <a:rPr kumimoji="0" lang="en-US" altLang="zh-CN" sz="2400" u="none" strike="noStrike" cap="none" normalizeH="0" baseline="0" dirty="0" smtClean="0">
-                          <a:ln>
-                            <a:noFill/>
-                          </a:ln>
-                          <a:effectLst/>
-                        </a:rPr>
-                        <a:t>…</a:t>
-                      </a:r>
-                      <a:endParaRPr kumimoji="0" lang="en-US" altLang="zh-CN" sz="2400" u="none" strike="noStrike" cap="none" normalizeH="0" baseline="0" dirty="0" smtClean="0">
-                        <a:ln>
-                          <a:noFill/>
-                        </a:ln>
-                        <a:effectLst/>
-                      </a:endParaRPr>
-                    </a:p>
+                    <a:p/>
                   </a:txBody>
                   <a:tcPr marL="91435" marR="91435" marT="45725" marB="45725" anchor="ctr" horzOverflow="overflow"/>
                 </a:tc>
@@ -21513,36 +22041,9 @@
                       </a:lvl9pPr>
                     </a:lstStyle>
                     <a:p>
-                      <a:pPr marL="0" marR="0" lvl="0" indent="0" algn="ctr" defTabSz="914400" rtl="0" eaLnBrk="1" fontAlgn="base" latinLnBrk="0" hangingPunct="1">
-                        <a:lnSpc>
-                          <a:spcPct val="150000"/>
-                        </a:lnSpc>
-                        <a:spcBef>
-                          <a:spcPct val="0"/>
-                        </a:spcBef>
-                        <a:spcAft>
-                          <a:spcPct val="0"/>
-                        </a:spcAft>
-                        <a:buClrTx/>
-                        <a:buSzTx/>
-                        <a:buFontTx/>
-                        <a:buNone/>
-                      </a:pPr>
                       <a:r>
-                        <a:rPr kumimoji="0" lang="en-US" altLang="zh-CN" sz="2400" u="none" strike="noStrike" cap="none" normalizeH="0" baseline="0" dirty="0" smtClean="0">
-                          <a:ln>
-                            <a:noFill/>
-                          </a:ln>
-                          <a:effectLst/>
-                        </a:rPr>
-                        <a:t>…</a:t>
+                        <a:t>√</a:t>
                       </a:r>
-                      <a:endParaRPr kumimoji="0" lang="en-US" altLang="zh-CN" sz="2400" u="none" strike="noStrike" cap="none" normalizeH="0" baseline="0" dirty="0" smtClean="0">
-                        <a:ln>
-                          <a:noFill/>
-                        </a:ln>
-                        <a:effectLst/>
-                      </a:endParaRPr>
                     </a:p>
                   </a:txBody>
                   <a:tcPr marL="91435" marR="91435" marT="45725" marB="45725" anchor="ctr" horzOverflow="overflow"/>
@@ -22873,7 +23374,7 @@
         <p:spPr>
           <a:xfrm>
             <a:off x="662509" y="1052250"/>
-            <a:ext cx="6480720" cy="521970"/>
+            <a:ext cx="11049000" cy="521970"/>
           </a:xfrm>
           <a:prstGeom prst="rect">
             <a:avLst/>
@@ -22884,25 +23385,21 @@
             <a:spAutoFit/>
           </a:bodyPr>
           <a:p>
+            <a:pPr>
+              <a:lnSpc>
+                <a:spcPct val="112000"/>
+              </a:lnSpc>
+              <a:spcAft>
+                <a:spcPts val="0"/>
+              </a:spcAft>
+            </a:pPr>
             <a:r>
-              <a:rPr lang="zh-CN" altLang="en-US" sz="2800" b="1" dirty="0" smtClean="0">
-                <a:solidFill>
-                  <a:schemeClr val="bg1"/>
-                </a:solidFill>
-                <a:latin typeface="微软雅黑" panose="020B0503020204020204" charset="-122"/>
-                <a:ea typeface="微软雅黑" panose="020B0503020204020204" charset="-122"/>
+              <a:rPr sz="1400" b="1">
+                <a:latin typeface="微软雅黑"/>
+                <a:ea typeface="微软雅黑"/>
+                <a:cs typeface="微软雅黑"/>
               </a:rPr>
-              <a:t>关键绩效行为实例</a:t>
-            </a:r>
-            <a:r>
-              <a:rPr lang="en-US" altLang="zh-CN" sz="2800" b="1" dirty="0" smtClean="0">
-                <a:solidFill>
-                  <a:schemeClr val="bg1"/>
-                </a:solidFill>
-                <a:latin typeface="微软雅黑" panose="020B0503020204020204" charset="-122"/>
-                <a:ea typeface="微软雅黑" panose="020B0503020204020204" charset="-122"/>
-              </a:rPr>
-              <a:t>1</a:t>
+              <a:t>关键绩效行为实例1：务实 —— 账号注销数据残留深度排查</a:t>
             </a:r>
             <a:endParaRPr lang="en-US" altLang="zh-CN" sz="2800" b="1" dirty="0" smtClean="0">
               <a:solidFill>
@@ -22926,8 +23423,8 @@
         </p:nvSpPr>
         <p:spPr>
           <a:xfrm>
-            <a:off x="1047115" y="1770380"/>
-            <a:ext cx="6096000" cy="368300"/>
+            <a:off x="762000" y="1778000"/>
+            <a:ext cx="10795000" cy="4572000"/>
           </a:xfrm>
           <a:prstGeom prst="rect">
             <a:avLst/>
@@ -22939,53 +23436,21 @@
             <a:spAutoFit/>
           </a:bodyPr>
           <a:p>
+            <a:pPr>
+              <a:lnSpc>
+                <a:spcPct val="108000"/>
+              </a:lnSpc>
+              <a:spcAft>
+                <a:spcPts val="200"/>
+              </a:spcAft>
+            </a:pPr>
             <a:r>
-              <a:rPr lang="zh-CN" altLang="en-US" dirty="0" smtClean="0">
-                <a:solidFill>
-                  <a:schemeClr val="bg1"/>
-                </a:solidFill>
-                <a:latin typeface="微软雅黑" panose="020B0503020204020204" charset="-122"/>
-                <a:ea typeface="微软雅黑" panose="020B0503020204020204" charset="-122"/>
-                <a:cs typeface="微软雅黑" panose="020B0503020204020204" charset="-122"/>
-                <a:sym typeface="+mn-ea"/>
+              <a:rPr sz="1150" b="1">
+                <a:latin typeface="微软雅黑"/>
+                <a:ea typeface="微软雅黑"/>
+                <a:cs typeface="微软雅黑"/>
               </a:rPr>
-              <a:t>请用</a:t>
-            </a:r>
-            <a:r>
-              <a:rPr lang="en-US" altLang="zh-CN" dirty="0" smtClean="0">
-                <a:solidFill>
-                  <a:schemeClr val="bg1"/>
-                </a:solidFill>
-                <a:latin typeface="微软雅黑" panose="020B0503020204020204" charset="-122"/>
-                <a:ea typeface="微软雅黑" panose="020B0503020204020204" charset="-122"/>
-                <a:cs typeface="微软雅黑" panose="020B0503020204020204" charset="-122"/>
-                <a:sym typeface="+mn-ea"/>
-              </a:rPr>
-              <a:t>START</a:t>
-            </a:r>
-            <a:r>
-              <a:rPr lang="zh-CN" altLang="en-US" dirty="0" smtClean="0">
-                <a:solidFill>
-                  <a:schemeClr val="bg1"/>
-                </a:solidFill>
-                <a:latin typeface="微软雅黑" panose="020B0503020204020204" charset="-122"/>
-                <a:ea typeface="微软雅黑" panose="020B0503020204020204" charset="-122"/>
-                <a:cs typeface="微软雅黑" panose="020B0503020204020204" charset="-122"/>
-                <a:sym typeface="+mn-ea"/>
-              </a:rPr>
-              <a:t>结构进行展示，述职时</a:t>
-            </a:r>
-            <a:r>
-              <a:rPr lang="zh-CN" altLang="en-US" dirty="0" smtClean="0">
-                <a:solidFill>
-                  <a:schemeClr val="bg1"/>
-                </a:solidFill>
-                <a:latin typeface="微软雅黑" panose="020B0503020204020204" charset="-122"/>
-                <a:ea typeface="微软雅黑" panose="020B0503020204020204" charset="-122"/>
-                <a:cs typeface="微软雅黑" panose="020B0503020204020204" charset="-122"/>
-                <a:sym typeface="+mn-ea"/>
-              </a:rPr>
-              <a:t>请删除</a:t>
+              <a:t>对应能力：务实（自评：杰出）</a:t>
             </a:r>
             <a:endParaRPr lang="zh-CN" altLang="en-US" dirty="0" smtClean="0">
               <a:solidFill>
@@ -22996,6 +23461,214 @@
               <a:cs typeface="微软雅黑" panose="020B0503020204020204" charset="-122"/>
               <a:sym typeface="+mn-ea"/>
             </a:endParaRPr>
+          </a:p>
+          <a:p>
+            <a:pPr>
+              <a:lnSpc>
+                <a:spcPct val="108000"/>
+              </a:lnSpc>
+              <a:spcAft>
+                <a:spcPts val="400"/>
+              </a:spcAft>
+            </a:pPr>
+          </a:p>
+          <a:p>
+            <a:pPr>
+              <a:lnSpc>
+                <a:spcPct val="108000"/>
+              </a:lnSpc>
+              <a:spcAft>
+                <a:spcPts val="200"/>
+              </a:spcAft>
+            </a:pPr>
+            <a:r>
+              <a:rPr sz="1150" b="1">
+                <a:latin typeface="微软雅黑"/>
+                <a:ea typeface="微软雅黑"/>
+                <a:cs typeface="微软雅黑"/>
+              </a:rPr>
+              <a:t>S 情景</a:t>
+            </a:r>
+          </a:p>
+          <a:p>
+            <a:pPr>
+              <a:lnSpc>
+                <a:spcPct val="108000"/>
+              </a:lnSpc>
+              <a:spcAft>
+                <a:spcPts val="200"/>
+              </a:spcAft>
+            </a:pPr>
+            <a:r>
+              <a:rPr sz="1050" b="0">
+                <a:latin typeface="微软雅黑"/>
+                <a:ea typeface="微软雅黑"/>
+                <a:cs typeface="微软雅黑"/>
+              </a:rPr>
+              <a:t>测试「账号注销」功能时，前端提示注销成功，主表 ten_user 记录也确实清除了，按常规用例本可判定通过。</a:t>
+            </a:r>
+          </a:p>
+          <a:p>
+            <a:pPr>
+              <a:lnSpc>
+                <a:spcPct val="108000"/>
+              </a:lnSpc>
+              <a:spcAft>
+                <a:spcPts val="200"/>
+              </a:spcAft>
+            </a:pPr>
+            <a:r>
+              <a:rPr sz="1150" b="1">
+                <a:latin typeface="微软雅黑"/>
+                <a:ea typeface="微软雅黑"/>
+                <a:cs typeface="微软雅黑"/>
+              </a:rPr>
+              <a:t>T 行为</a:t>
+            </a:r>
+          </a:p>
+          <a:p>
+            <a:pPr>
+              <a:lnSpc>
+                <a:spcPct val="108000"/>
+              </a:lnSpc>
+              <a:spcAft>
+                <a:spcPts val="200"/>
+              </a:spcAft>
+            </a:pPr>
+            <a:r>
+              <a:rPr sz="1050" b="0">
+                <a:latin typeface="微软雅黑"/>
+                <a:ea typeface="微软雅黑"/>
+                <a:cs typeface="微软雅黑"/>
+              </a:rPr>
+              <a:t>我没有停在功能层面，而是顺着 open_id 往数据库追：写脚本比对关联表，发现 video_order 残留 68 条、video_coupon_record 5 条、ten_user_auth 的 token 未失效，ten_user_ext、ten_user_prompt 同样有残留。</a:t>
+            </a:r>
+          </a:p>
+          <a:p>
+            <a:pPr>
+              <a:lnSpc>
+                <a:spcPct val="108000"/>
+              </a:lnSpc>
+              <a:spcAft>
+                <a:spcPts val="200"/>
+              </a:spcAft>
+            </a:pPr>
+            <a:r>
+              <a:rPr sz="1050" b="0">
+                <a:latin typeface="微软雅黑"/>
+                <a:ea typeface="微软雅黑"/>
+                <a:cs typeface="微软雅黑"/>
+              </a:rPr>
+              <a:t>进一步核查发现：同一微信 open_id 反复注册会产生 17 个不同 user_id，用户数据完全割裂。</a:t>
+            </a:r>
+          </a:p>
+          <a:p>
+            <a:pPr>
+              <a:lnSpc>
+                <a:spcPct val="108000"/>
+              </a:lnSpc>
+              <a:spcAft>
+                <a:spcPts val="200"/>
+              </a:spcAft>
+            </a:pPr>
+            <a:r>
+              <a:rPr sz="1150" b="1">
+                <a:latin typeface="微软雅黑"/>
+                <a:ea typeface="微软雅黑"/>
+                <a:cs typeface="微软雅黑"/>
+              </a:rPr>
+              <a:t>A 影响</a:t>
+            </a:r>
+          </a:p>
+          <a:p>
+            <a:pPr>
+              <a:lnSpc>
+                <a:spcPct val="108000"/>
+              </a:lnSpc>
+              <a:spcAft>
+                <a:spcPts val="200"/>
+              </a:spcAft>
+            </a:pPr>
+            <a:r>
+              <a:rPr sz="1050" b="0">
+                <a:latin typeface="微软雅黑"/>
+                <a:ea typeface="微软雅黑"/>
+                <a:cs typeface="微软雅黑"/>
+              </a:rPr>
+              <a:t>把问题从「一个注销 bug」升级为「账号生命周期的数据一致性」问题，推动开发由单点删除改为全关联表清理，并同步产品确认注销后的资产处理口径。</a:t>
+            </a:r>
+          </a:p>
+          <a:p>
+            <a:pPr>
+              <a:lnSpc>
+                <a:spcPct val="108000"/>
+              </a:lnSpc>
+              <a:spcAft>
+                <a:spcPts val="200"/>
+              </a:spcAft>
+            </a:pPr>
+            <a:r>
+              <a:rPr sz="1150" b="1">
+                <a:latin typeface="微软雅黑"/>
+                <a:ea typeface="微软雅黑"/>
+                <a:cs typeface="微软雅黑"/>
+              </a:rPr>
+              <a:t>R 结果</a:t>
+            </a:r>
+          </a:p>
+          <a:p>
+            <a:pPr>
+              <a:lnSpc>
+                <a:spcPct val="108000"/>
+              </a:lnSpc>
+              <a:spcAft>
+                <a:spcPts val="200"/>
+              </a:spcAft>
+            </a:pPr>
+            <a:r>
+              <a:rPr sz="1050" b="0">
+                <a:latin typeface="微软雅黑"/>
+                <a:ea typeface="微软雅黑"/>
+                <a:cs typeface="微软雅黑"/>
+              </a:rPr>
+              <a:t>残留数据被完整定位，注销流程的清理范围明确；顺带暴露出重复注册导致的数据割裂风险，避免上线后出现「重新注册却看到历史订单」的客诉。</a:t>
+            </a:r>
+          </a:p>
+          <a:p>
+            <a:pPr>
+              <a:lnSpc>
+                <a:spcPct val="108000"/>
+              </a:lnSpc>
+              <a:spcAft>
+                <a:spcPts val="200"/>
+              </a:spcAft>
+            </a:pPr>
+            <a:r>
+              <a:rPr sz="1150" b="1">
+                <a:latin typeface="微软雅黑"/>
+                <a:ea typeface="微软雅黑"/>
+                <a:cs typeface="微软雅黑"/>
+              </a:rPr>
+              <a:t>T 反思</a:t>
+            </a:r>
+          </a:p>
+          <a:p>
+            <a:pPr>
+              <a:lnSpc>
+                <a:spcPct val="108000"/>
+              </a:lnSpc>
+              <a:spcAft>
+                <a:spcPts val="200"/>
+              </a:spcAft>
+            </a:pPr>
+            <a:r>
+              <a:rPr sz="1050" b="0">
+                <a:latin typeface="微软雅黑"/>
+                <a:ea typeface="微软雅黑"/>
+                <a:cs typeface="微软雅黑"/>
+              </a:rPr>
+              <a:t>功能通过不等于数据正确。此后我把「关联表残留核查」写入账号类用例的必查项，提缺陷时也习惯先补齐数据层面的证据链。</a:t>
+            </a:r>
           </a:p>
         </p:txBody>
       </p:sp>
